--- a/materials/презентация-2.pptx
+++ b/materials/презентация-2.pptx
@@ -322,6 +322,11 @@
       </a:defRPr>
     </a:lvl9pPr>
   </p:defaultTextStyle>
+  <p:extLst>
+    <p:ext uri="{EFAFB233-063F-42B5-8137-9DF3F51BA10A}">
+      <p15:sldGuideLst xmlns:p15="http://schemas.microsoft.com/office/powerpoint/2012/main"/>
+    </p:ext>
+  </p:extLst>
 </p:presentation>
 </file>
 
@@ -3181,7 +3186,7 @@
           </a:ln>
           <a:extLst>
             <a:ext uri="{C572A759-6A51-4108-AA02-DFA0A04FC94B}">
-              <ma14:wrappingTextBoxFlag xmlns:ma14="http://schemas.microsoft.com/office/mac/drawingml/2011/main" xmlns:a14="http://schemas.microsoft.com/office/drawing/2010/main" xmlns:m="http://schemas.openxmlformats.org/officeDocument/2006/math" xmlns="" val="1"/>
+              <ma14:wrappingTextBoxFlag xmlns="" xmlns:m="http://schemas.openxmlformats.org/officeDocument/2006/math" xmlns:a14="http://schemas.microsoft.com/office/drawing/2010/main" xmlns:ma14="http://schemas.microsoft.com/office/mac/drawingml/2011/main" val="1"/>
             </a:ext>
           </a:extLst>
         </p:spPr>
@@ -3220,7 +3225,7 @@
           </a:ln>
           <a:extLst>
             <a:ext uri="{C572A759-6A51-4108-AA02-DFA0A04FC94B}">
-              <ma14:wrappingTextBoxFlag xmlns:ma14="http://schemas.microsoft.com/office/mac/drawingml/2011/main" xmlns:a14="http://schemas.microsoft.com/office/drawing/2010/main" xmlns:m="http://schemas.openxmlformats.org/officeDocument/2006/math" xmlns="" val="1"/>
+              <ma14:wrappingTextBoxFlag xmlns="" xmlns:m="http://schemas.openxmlformats.org/officeDocument/2006/math" xmlns:a14="http://schemas.microsoft.com/office/drawing/2010/main" xmlns:ma14="http://schemas.microsoft.com/office/mac/drawingml/2011/main" val="1"/>
             </a:ext>
           </a:extLst>
         </p:spPr>
@@ -4076,7 +4081,7 @@
           </a:ln>
           <a:extLst>
             <a:ext uri="{C572A759-6A51-4108-AA02-DFA0A04FC94B}">
-              <ma14:wrappingTextBoxFlag xmlns:ma14="http://schemas.microsoft.com/office/mac/drawingml/2011/main" xmlns:a14="http://schemas.microsoft.com/office/drawing/2010/main" xmlns:m="http://schemas.openxmlformats.org/officeDocument/2006/math" xmlns="" val="1"/>
+              <ma14:wrappingTextBoxFlag xmlns="" xmlns:m="http://schemas.openxmlformats.org/officeDocument/2006/math" xmlns:a14="http://schemas.microsoft.com/office/drawing/2010/main" xmlns:ma14="http://schemas.microsoft.com/office/mac/drawingml/2011/main" val="1"/>
             </a:ext>
           </a:extLst>
         </p:spPr>
@@ -4190,7 +4195,7 @@
           </a:ln>
           <a:extLst>
             <a:ext uri="{C572A759-6A51-4108-AA02-DFA0A04FC94B}">
-              <ma14:wrappingTextBoxFlag xmlns:ma14="http://schemas.microsoft.com/office/mac/drawingml/2011/main" xmlns:a14="http://schemas.microsoft.com/office/drawing/2010/main" xmlns:m="http://schemas.openxmlformats.org/officeDocument/2006/math" xmlns="" val="1"/>
+              <ma14:wrappingTextBoxFlag xmlns="" xmlns:m="http://schemas.openxmlformats.org/officeDocument/2006/math" xmlns:a14="http://schemas.microsoft.com/office/drawing/2010/main" xmlns:ma14="http://schemas.microsoft.com/office/mac/drawingml/2011/main" val="1"/>
             </a:ext>
           </a:extLst>
         </p:spPr>
@@ -4263,7 +4268,7 @@
           </a:ln>
           <a:extLst>
             <a:ext uri="{C572A759-6A51-4108-AA02-DFA0A04FC94B}">
-              <ma14:wrappingTextBoxFlag xmlns:ma14="http://schemas.microsoft.com/office/mac/drawingml/2011/main" xmlns:a14="http://schemas.microsoft.com/office/drawing/2010/main" xmlns:m="http://schemas.openxmlformats.org/officeDocument/2006/math" xmlns="" val="1"/>
+              <ma14:wrappingTextBoxFlag xmlns="" xmlns:m="http://schemas.openxmlformats.org/officeDocument/2006/math" xmlns:a14="http://schemas.microsoft.com/office/drawing/2010/main" xmlns:ma14="http://schemas.microsoft.com/office/mac/drawingml/2011/main" val="1"/>
             </a:ext>
           </a:extLst>
         </p:spPr>
@@ -4391,7 +4396,7 @@
           </a:ln>
           <a:extLst>
             <a:ext uri="{C572A759-6A51-4108-AA02-DFA0A04FC94B}">
-              <ma14:wrappingTextBoxFlag xmlns:ma14="http://schemas.microsoft.com/office/mac/drawingml/2011/main" xmlns:a14="http://schemas.microsoft.com/office/drawing/2010/main" xmlns:m="http://schemas.openxmlformats.org/officeDocument/2006/math" xmlns="" val="1"/>
+              <ma14:wrappingTextBoxFlag xmlns="" xmlns:m="http://schemas.openxmlformats.org/officeDocument/2006/math" xmlns:a14="http://schemas.microsoft.com/office/drawing/2010/main" xmlns:ma14="http://schemas.microsoft.com/office/mac/drawingml/2011/main" val="1"/>
             </a:ext>
           </a:extLst>
         </p:spPr>
@@ -4465,20 +4470,17 @@
             </a:pPr>
             <a:r>
               <a:rPr dirty="0" err="1"/>
-              <a:t>Выполнила</a:t>
-            </a:r>
-            <a:r>
-              <a:rPr dirty="0"/>
-              <a:t>: </a:t>
-            </a:r>
-            <a:r>
-              <a:rPr dirty="0" err="1"/>
-              <a:t>Телегина</a:t>
-            </a:r>
-            <a:r>
-              <a:rPr dirty="0"/>
-              <a:t> А.С.</a:t>
-            </a:r>
+              <a:t>Выполнил</a:t>
+            </a:r>
+            <a:r>
+              <a:rPr lang="ru-RU" dirty="0"/>
+              <a:t>: Гребенев В. </a:t>
+            </a:r>
+            <a:r>
+              <a:rPr lang="ru-RU"/>
+              <a:t>А.</a:t>
+            </a:r>
+            <a:endParaRPr dirty="0"/>
           </a:p>
         </p:txBody>
       </p:sp>
@@ -4578,7 +4580,7 @@
             <a:effectLst/>
             <a:extLst>
               <a:ext uri="{C572A759-6A51-4108-AA02-DFA0A04FC94B}">
-                <ma14:wrappingTextBoxFlag xmlns:ma14="http://schemas.microsoft.com/office/mac/drawingml/2011/main" xmlns:a14="http://schemas.microsoft.com/office/drawing/2010/main" xmlns:m="http://schemas.openxmlformats.org/officeDocument/2006/math" xmlns="" val="1"/>
+                <ma14:wrappingTextBoxFlag xmlns="" xmlns:m="http://schemas.openxmlformats.org/officeDocument/2006/math" xmlns:a14="http://schemas.microsoft.com/office/drawing/2010/main" xmlns:ma14="http://schemas.microsoft.com/office/mac/drawingml/2011/main" val="1"/>
               </a:ext>
             </a:extLst>
           </p:spPr>
@@ -4618,7 +4620,7 @@
           </a:ln>
           <a:extLst>
             <a:ext uri="{C572A759-6A51-4108-AA02-DFA0A04FC94B}">
-              <ma14:wrappingTextBoxFlag xmlns:ma14="http://schemas.microsoft.com/office/mac/drawingml/2011/main" xmlns:a14="http://schemas.microsoft.com/office/drawing/2010/main" xmlns:m="http://schemas.openxmlformats.org/officeDocument/2006/math" xmlns="" val="1"/>
+              <ma14:wrappingTextBoxFlag xmlns="" xmlns:m="http://schemas.openxmlformats.org/officeDocument/2006/math" xmlns:a14="http://schemas.microsoft.com/office/drawing/2010/main" xmlns:ma14="http://schemas.microsoft.com/office/mac/drawingml/2011/main" val="1"/>
             </a:ext>
           </a:extLst>
         </p:spPr>
@@ -4843,7 +4845,7 @@
             <a:effectLst/>
             <a:extLst>
               <a:ext uri="{C572A759-6A51-4108-AA02-DFA0A04FC94B}">
-                <ma14:wrappingTextBoxFlag xmlns:ma14="http://schemas.microsoft.com/office/mac/drawingml/2011/main" xmlns:a14="http://schemas.microsoft.com/office/drawing/2010/main" xmlns:m="http://schemas.openxmlformats.org/officeDocument/2006/math" xmlns="" val="1"/>
+                <ma14:wrappingTextBoxFlag xmlns="" xmlns:m="http://schemas.openxmlformats.org/officeDocument/2006/math" xmlns:a14="http://schemas.microsoft.com/office/drawing/2010/main" xmlns:ma14="http://schemas.microsoft.com/office/mac/drawingml/2011/main" val="1"/>
               </a:ext>
             </a:extLst>
           </p:spPr>
@@ -5014,7 +5016,7 @@
             <a:effectLst/>
             <a:extLst>
               <a:ext uri="{C572A759-6A51-4108-AA02-DFA0A04FC94B}">
-                <ma14:wrappingTextBoxFlag xmlns:ma14="http://schemas.microsoft.com/office/mac/drawingml/2011/main" xmlns:a14="http://schemas.microsoft.com/office/drawing/2010/main" xmlns:m="http://schemas.openxmlformats.org/officeDocument/2006/math" xmlns="" val="1"/>
+                <ma14:wrappingTextBoxFlag xmlns="" xmlns:m="http://schemas.openxmlformats.org/officeDocument/2006/math" xmlns:a14="http://schemas.microsoft.com/office/drawing/2010/main" xmlns:ma14="http://schemas.microsoft.com/office/mac/drawingml/2011/main" val="1"/>
               </a:ext>
             </a:extLst>
           </p:spPr>
@@ -5185,7 +5187,7 @@
             <a:effectLst/>
             <a:extLst>
               <a:ext uri="{C572A759-6A51-4108-AA02-DFA0A04FC94B}">
-                <ma14:wrappingTextBoxFlag xmlns:ma14="http://schemas.microsoft.com/office/mac/drawingml/2011/main" xmlns:a14="http://schemas.microsoft.com/office/drawing/2010/main" xmlns:m="http://schemas.openxmlformats.org/officeDocument/2006/math" xmlns="" val="1"/>
+                <ma14:wrappingTextBoxFlag xmlns="" xmlns:m="http://schemas.openxmlformats.org/officeDocument/2006/math" xmlns:a14="http://schemas.microsoft.com/office/drawing/2010/main" xmlns:ma14="http://schemas.microsoft.com/office/mac/drawingml/2011/main" val="1"/>
               </a:ext>
             </a:extLst>
           </p:spPr>
@@ -5231,7 +5233,7 @@
           </a:ln>
           <a:extLst>
             <a:ext uri="{C572A759-6A51-4108-AA02-DFA0A04FC94B}">
-              <ma14:wrappingTextBoxFlag xmlns:ma14="http://schemas.microsoft.com/office/mac/drawingml/2011/main" xmlns:a14="http://schemas.microsoft.com/office/drawing/2010/main" xmlns:m="http://schemas.openxmlformats.org/officeDocument/2006/math" xmlns="" val="1"/>
+              <ma14:wrappingTextBoxFlag xmlns="" xmlns:m="http://schemas.openxmlformats.org/officeDocument/2006/math" xmlns:a14="http://schemas.microsoft.com/office/drawing/2010/main" xmlns:ma14="http://schemas.microsoft.com/office/mac/drawingml/2011/main" val="1"/>
             </a:ext>
           </a:extLst>
         </p:spPr>
@@ -5473,7 +5475,7 @@
             <a:effectLst/>
             <a:extLst>
               <a:ext uri="{C572A759-6A51-4108-AA02-DFA0A04FC94B}">
-                <ma14:wrappingTextBoxFlag xmlns:ma14="http://schemas.microsoft.com/office/mac/drawingml/2011/main" xmlns:a14="http://schemas.microsoft.com/office/drawing/2010/main" xmlns:m="http://schemas.openxmlformats.org/officeDocument/2006/math" xmlns="" val="1"/>
+                <ma14:wrappingTextBoxFlag xmlns="" xmlns:m="http://schemas.openxmlformats.org/officeDocument/2006/math" xmlns:a14="http://schemas.microsoft.com/office/drawing/2010/main" xmlns:ma14="http://schemas.microsoft.com/office/mac/drawingml/2011/main" val="1"/>
               </a:ext>
             </a:extLst>
           </p:spPr>
@@ -5513,7 +5515,7 @@
           </a:ln>
           <a:extLst>
             <a:ext uri="{C572A759-6A51-4108-AA02-DFA0A04FC94B}">
-              <ma14:wrappingTextBoxFlag xmlns:ma14="http://schemas.microsoft.com/office/mac/drawingml/2011/main" xmlns:a14="http://schemas.microsoft.com/office/drawing/2010/main" xmlns:m="http://schemas.openxmlformats.org/officeDocument/2006/math" xmlns="" val="1"/>
+              <ma14:wrappingTextBoxFlag xmlns="" xmlns:m="http://schemas.openxmlformats.org/officeDocument/2006/math" xmlns:a14="http://schemas.microsoft.com/office/drawing/2010/main" xmlns:ma14="http://schemas.microsoft.com/office/mac/drawingml/2011/main" val="1"/>
             </a:ext>
           </a:extLst>
         </p:spPr>
@@ -5676,7 +5678,7 @@
             <a:effectLst/>
             <a:extLst>
               <a:ext uri="{C572A759-6A51-4108-AA02-DFA0A04FC94B}">
-                <ma14:wrappingTextBoxFlag xmlns:ma14="http://schemas.microsoft.com/office/mac/drawingml/2011/main" xmlns:a14="http://schemas.microsoft.com/office/drawing/2010/main" xmlns:m="http://schemas.openxmlformats.org/officeDocument/2006/math" xmlns="" val="1"/>
+                <ma14:wrappingTextBoxFlag xmlns="" xmlns:m="http://schemas.openxmlformats.org/officeDocument/2006/math" xmlns:a14="http://schemas.microsoft.com/office/drawing/2010/main" xmlns:ma14="http://schemas.microsoft.com/office/mac/drawingml/2011/main" val="1"/>
               </a:ext>
             </a:extLst>
           </p:spPr>
@@ -5716,7 +5718,7 @@
           </a:ln>
           <a:extLst>
             <a:ext uri="{C572A759-6A51-4108-AA02-DFA0A04FC94B}">
-              <ma14:wrappingTextBoxFlag xmlns:ma14="http://schemas.microsoft.com/office/mac/drawingml/2011/main" xmlns:a14="http://schemas.microsoft.com/office/drawing/2010/main" xmlns:m="http://schemas.openxmlformats.org/officeDocument/2006/math" xmlns="" val="1"/>
+              <ma14:wrappingTextBoxFlag xmlns="" xmlns:m="http://schemas.openxmlformats.org/officeDocument/2006/math" xmlns:a14="http://schemas.microsoft.com/office/drawing/2010/main" xmlns:ma14="http://schemas.microsoft.com/office/mac/drawingml/2011/main" val="1"/>
             </a:ext>
           </a:extLst>
         </p:spPr>
@@ -6132,7 +6134,7 @@
             <a:effectLst/>
             <a:extLst>
               <a:ext uri="{C572A759-6A51-4108-AA02-DFA0A04FC94B}">
-                <ma14:wrappingTextBoxFlag xmlns:ma14="http://schemas.microsoft.com/office/mac/drawingml/2011/main" xmlns:a14="http://schemas.microsoft.com/office/drawing/2010/main" xmlns:m="http://schemas.openxmlformats.org/officeDocument/2006/math" xmlns="" val="1"/>
+                <ma14:wrappingTextBoxFlag xmlns="" xmlns:m="http://schemas.openxmlformats.org/officeDocument/2006/math" xmlns:a14="http://schemas.microsoft.com/office/drawing/2010/main" xmlns:ma14="http://schemas.microsoft.com/office/mac/drawingml/2011/main" val="1"/>
               </a:ext>
             </a:extLst>
           </p:spPr>
@@ -6172,7 +6174,7 @@
           </a:ln>
           <a:extLst>
             <a:ext uri="{C572A759-6A51-4108-AA02-DFA0A04FC94B}">
-              <ma14:wrappingTextBoxFlag xmlns:ma14="http://schemas.microsoft.com/office/mac/drawingml/2011/main" xmlns:a14="http://schemas.microsoft.com/office/drawing/2010/main" xmlns:m="http://schemas.openxmlformats.org/officeDocument/2006/math" xmlns="" val="1"/>
+              <ma14:wrappingTextBoxFlag xmlns="" xmlns:m="http://schemas.openxmlformats.org/officeDocument/2006/math" xmlns:a14="http://schemas.microsoft.com/office/drawing/2010/main" xmlns:ma14="http://schemas.microsoft.com/office/mac/drawingml/2011/main" val="1"/>
             </a:ext>
           </a:extLst>
         </p:spPr>
@@ -6288,7 +6290,7 @@
           </a:ln>
           <a:extLst>
             <a:ext uri="{C572A759-6A51-4108-AA02-DFA0A04FC94B}">
-              <ma14:wrappingTextBoxFlag xmlns:ma14="http://schemas.microsoft.com/office/mac/drawingml/2011/main" xmlns:a14="http://schemas.microsoft.com/office/drawing/2010/main" xmlns:m="http://schemas.openxmlformats.org/officeDocument/2006/math" xmlns="" val="1"/>
+              <ma14:wrappingTextBoxFlag xmlns="" xmlns:m="http://schemas.openxmlformats.org/officeDocument/2006/math" xmlns:a14="http://schemas.microsoft.com/office/drawing/2010/main" xmlns:ma14="http://schemas.microsoft.com/office/mac/drawingml/2011/main" val="1"/>
             </a:ext>
           </a:extLst>
         </p:spPr>
@@ -6471,7 +6473,7 @@
             <a:effectLst/>
             <a:extLst>
               <a:ext uri="{C572A759-6A51-4108-AA02-DFA0A04FC94B}">
-                <ma14:wrappingTextBoxFlag xmlns:ma14="http://schemas.microsoft.com/office/mac/drawingml/2011/main" xmlns:a14="http://schemas.microsoft.com/office/drawing/2010/main" xmlns:m="http://schemas.openxmlformats.org/officeDocument/2006/math" xmlns="" val="1"/>
+                <ma14:wrappingTextBoxFlag xmlns="" xmlns:m="http://schemas.openxmlformats.org/officeDocument/2006/math" xmlns:a14="http://schemas.microsoft.com/office/drawing/2010/main" xmlns:ma14="http://schemas.microsoft.com/office/mac/drawingml/2011/main" val="1"/>
               </a:ext>
             </a:extLst>
           </p:spPr>
@@ -6615,7 +6617,7 @@
             <a:effectLst/>
             <a:extLst>
               <a:ext uri="{C572A759-6A51-4108-AA02-DFA0A04FC94B}">
-                <ma14:wrappingTextBoxFlag xmlns:ma14="http://schemas.microsoft.com/office/mac/drawingml/2011/main" xmlns:a14="http://schemas.microsoft.com/office/drawing/2010/main" xmlns:m="http://schemas.openxmlformats.org/officeDocument/2006/math" xmlns="" val="1"/>
+                <ma14:wrappingTextBoxFlag xmlns="" xmlns:m="http://schemas.openxmlformats.org/officeDocument/2006/math" xmlns:a14="http://schemas.microsoft.com/office/drawing/2010/main" xmlns:ma14="http://schemas.microsoft.com/office/mac/drawingml/2011/main" val="1"/>
               </a:ext>
             </a:extLst>
           </p:spPr>
@@ -6768,7 +6770,7 @@
             <a:effectLst/>
             <a:extLst>
               <a:ext uri="{C572A759-6A51-4108-AA02-DFA0A04FC94B}">
-                <ma14:wrappingTextBoxFlag xmlns:ma14="http://schemas.microsoft.com/office/mac/drawingml/2011/main" xmlns:a14="http://schemas.microsoft.com/office/drawing/2010/main" xmlns:m="http://schemas.openxmlformats.org/officeDocument/2006/math" xmlns="" val="1"/>
+                <ma14:wrappingTextBoxFlag xmlns="" xmlns:m="http://schemas.openxmlformats.org/officeDocument/2006/math" xmlns:a14="http://schemas.microsoft.com/office/drawing/2010/main" xmlns:ma14="http://schemas.microsoft.com/office/mac/drawingml/2011/main" val="1"/>
               </a:ext>
             </a:extLst>
           </p:spPr>
@@ -6808,7 +6810,7 @@
           </a:ln>
           <a:extLst>
             <a:ext uri="{C572A759-6A51-4108-AA02-DFA0A04FC94B}">
-              <ma14:wrappingTextBoxFlag xmlns:ma14="http://schemas.microsoft.com/office/mac/drawingml/2011/main" xmlns:a14="http://schemas.microsoft.com/office/drawing/2010/main" xmlns:m="http://schemas.openxmlformats.org/officeDocument/2006/math" xmlns="" val="1"/>
+              <ma14:wrappingTextBoxFlag xmlns="" xmlns:m="http://schemas.openxmlformats.org/officeDocument/2006/math" xmlns:a14="http://schemas.microsoft.com/office/drawing/2010/main" xmlns:ma14="http://schemas.microsoft.com/office/mac/drawingml/2011/main" val="1"/>
             </a:ext>
           </a:extLst>
         </p:spPr>
@@ -6984,7 +6986,7 @@
             <a:effectLst/>
             <a:extLst>
               <a:ext uri="{C572A759-6A51-4108-AA02-DFA0A04FC94B}">
-                <ma14:wrappingTextBoxFlag xmlns:ma14="http://schemas.microsoft.com/office/mac/drawingml/2011/main" xmlns:a14="http://schemas.microsoft.com/office/drawing/2010/main" xmlns:m="http://schemas.openxmlformats.org/officeDocument/2006/math" xmlns="" val="1"/>
+                <ma14:wrappingTextBoxFlag xmlns="" xmlns:m="http://schemas.openxmlformats.org/officeDocument/2006/math" xmlns:a14="http://schemas.microsoft.com/office/drawing/2010/main" xmlns:ma14="http://schemas.microsoft.com/office/mac/drawingml/2011/main" val="1"/>
               </a:ext>
             </a:extLst>
           </p:spPr>
@@ -7024,7 +7026,7 @@
           </a:ln>
           <a:extLst>
             <a:ext uri="{C572A759-6A51-4108-AA02-DFA0A04FC94B}">
-              <ma14:wrappingTextBoxFlag xmlns:ma14="http://schemas.microsoft.com/office/mac/drawingml/2011/main" xmlns:a14="http://schemas.microsoft.com/office/drawing/2010/main" xmlns:m="http://schemas.openxmlformats.org/officeDocument/2006/math" xmlns="" val="1"/>
+              <ma14:wrappingTextBoxFlag xmlns="" xmlns:m="http://schemas.openxmlformats.org/officeDocument/2006/math" xmlns:a14="http://schemas.microsoft.com/office/drawing/2010/main" xmlns:ma14="http://schemas.microsoft.com/office/mac/drawingml/2011/main" val="1"/>
             </a:ext>
           </a:extLst>
         </p:spPr>

--- a/materials/презентация-2.pptx
+++ b/materials/презентация-2.pptx
@@ -5,7 +5,7 @@
     <p:sldMasterId id="2147483648" r:id="rId1"/>
   </p:sldMasterIdLst>
   <p:notesMasterIdLst>
-    <p:notesMasterId r:id="rId15"/>
+    <p:notesMasterId r:id="rId18"/>
   </p:notesMasterIdLst>
   <p:sldIdLst>
     <p:sldId id="256" r:id="rId2"/>
@@ -18,9 +18,12 @@
     <p:sldId id="262" r:id="rId9"/>
     <p:sldId id="263" r:id="rId10"/>
     <p:sldId id="264" r:id="rId11"/>
-    <p:sldId id="265" r:id="rId12"/>
-    <p:sldId id="266" r:id="rId13"/>
-    <p:sldId id="274" r:id="rId14"/>
+    <p:sldId id="277" r:id="rId12"/>
+    <p:sldId id="275" r:id="rId13"/>
+    <p:sldId id="276" r:id="rId14"/>
+    <p:sldId id="265" r:id="rId15"/>
+    <p:sldId id="266" r:id="rId16"/>
+    <p:sldId id="274" r:id="rId17"/>
   </p:sldIdLst>
   <p:sldSz cx="12192000" cy="6858000"/>
   <p:notesSz cx="6858000" cy="9144000"/>
@@ -3186,7 +3189,7 @@
           </a:ln>
           <a:extLst>
             <a:ext uri="{C572A759-6A51-4108-AA02-DFA0A04FC94B}">
-              <ma14:wrappingTextBoxFlag xmlns="" xmlns:m="http://schemas.openxmlformats.org/officeDocument/2006/math" xmlns:a14="http://schemas.microsoft.com/office/drawing/2010/main" xmlns:ma14="http://schemas.microsoft.com/office/mac/drawingml/2011/main" val="1"/>
+              <ma14:wrappingTextBoxFlag xmlns:ma14="http://schemas.microsoft.com/office/mac/drawingml/2011/main" xmlns:a14="http://schemas.microsoft.com/office/drawing/2010/main" xmlns:m="http://schemas.openxmlformats.org/officeDocument/2006/math" xmlns="" val="1"/>
             </a:ext>
           </a:extLst>
         </p:spPr>
@@ -3225,7 +3228,7 @@
           </a:ln>
           <a:extLst>
             <a:ext uri="{C572A759-6A51-4108-AA02-DFA0A04FC94B}">
-              <ma14:wrappingTextBoxFlag xmlns="" xmlns:m="http://schemas.openxmlformats.org/officeDocument/2006/math" xmlns:a14="http://schemas.microsoft.com/office/drawing/2010/main" xmlns:ma14="http://schemas.microsoft.com/office/mac/drawingml/2011/main" val="1"/>
+              <ma14:wrappingTextBoxFlag xmlns:ma14="http://schemas.microsoft.com/office/mac/drawingml/2011/main" xmlns:a14="http://schemas.microsoft.com/office/drawing/2010/main" xmlns:m="http://schemas.openxmlformats.org/officeDocument/2006/math" xmlns="" val="1"/>
             </a:ext>
           </a:extLst>
         </p:spPr>
@@ -3332,6 +3335,7 @@
     <p:sldLayoutId id="2147483666" r:id="rId18"/>
   </p:sldLayoutIdLst>
   <p:transition spd="med"/>
+  <p:hf hdr="0" ftr="0" dt="0"/>
   <p:txStyles>
     <p:titleStyle>
       <a:lvl1pPr marL="0" marR="0" indent="0" algn="l" defTabSz="914400" rtl="0" latinLnBrk="0">
@@ -4081,7 +4085,7 @@
           </a:ln>
           <a:extLst>
             <a:ext uri="{C572A759-6A51-4108-AA02-DFA0A04FC94B}">
-              <ma14:wrappingTextBoxFlag xmlns="" xmlns:m="http://schemas.openxmlformats.org/officeDocument/2006/math" xmlns:a14="http://schemas.microsoft.com/office/drawing/2010/main" xmlns:ma14="http://schemas.microsoft.com/office/mac/drawingml/2011/main" val="1"/>
+              <ma14:wrappingTextBoxFlag xmlns:ma14="http://schemas.microsoft.com/office/mac/drawingml/2011/main" xmlns:a14="http://schemas.microsoft.com/office/drawing/2010/main" xmlns:m="http://schemas.openxmlformats.org/officeDocument/2006/math" xmlns="" val="1"/>
             </a:ext>
           </a:extLst>
         </p:spPr>
@@ -4195,7 +4199,7 @@
           </a:ln>
           <a:extLst>
             <a:ext uri="{C572A759-6A51-4108-AA02-DFA0A04FC94B}">
-              <ma14:wrappingTextBoxFlag xmlns="" xmlns:m="http://schemas.openxmlformats.org/officeDocument/2006/math" xmlns:a14="http://schemas.microsoft.com/office/drawing/2010/main" xmlns:ma14="http://schemas.microsoft.com/office/mac/drawingml/2011/main" val="1"/>
+              <ma14:wrappingTextBoxFlag xmlns:ma14="http://schemas.microsoft.com/office/mac/drawingml/2011/main" xmlns:a14="http://schemas.microsoft.com/office/drawing/2010/main" xmlns:m="http://schemas.openxmlformats.org/officeDocument/2006/math" xmlns="" val="1"/>
             </a:ext>
           </a:extLst>
         </p:spPr>
@@ -4268,7 +4272,7 @@
           </a:ln>
           <a:extLst>
             <a:ext uri="{C572A759-6A51-4108-AA02-DFA0A04FC94B}">
-              <ma14:wrappingTextBoxFlag xmlns="" xmlns:m="http://schemas.openxmlformats.org/officeDocument/2006/math" xmlns:a14="http://schemas.microsoft.com/office/drawing/2010/main" xmlns:ma14="http://schemas.microsoft.com/office/mac/drawingml/2011/main" val="1"/>
+              <ma14:wrappingTextBoxFlag xmlns:ma14="http://schemas.microsoft.com/office/mac/drawingml/2011/main" xmlns:a14="http://schemas.microsoft.com/office/drawing/2010/main" xmlns:m="http://schemas.openxmlformats.org/officeDocument/2006/math" xmlns="" val="1"/>
             </a:ext>
           </a:extLst>
         </p:spPr>
@@ -4396,7 +4400,7 @@
           </a:ln>
           <a:extLst>
             <a:ext uri="{C572A759-6A51-4108-AA02-DFA0A04FC94B}">
-              <ma14:wrappingTextBoxFlag xmlns="" xmlns:m="http://schemas.openxmlformats.org/officeDocument/2006/math" xmlns:a14="http://schemas.microsoft.com/office/drawing/2010/main" xmlns:ma14="http://schemas.microsoft.com/office/mac/drawingml/2011/main" val="1"/>
+              <ma14:wrappingTextBoxFlag xmlns:ma14="http://schemas.microsoft.com/office/mac/drawingml/2011/main" xmlns:a14="http://schemas.microsoft.com/office/drawing/2010/main" xmlns:m="http://schemas.openxmlformats.org/officeDocument/2006/math" xmlns="" val="1"/>
             </a:ext>
           </a:extLst>
         </p:spPr>
@@ -4580,7 +4584,7 @@
             <a:effectLst/>
             <a:extLst>
               <a:ext uri="{C572A759-6A51-4108-AA02-DFA0A04FC94B}">
-                <ma14:wrappingTextBoxFlag xmlns="" xmlns:m="http://schemas.openxmlformats.org/officeDocument/2006/math" xmlns:a14="http://schemas.microsoft.com/office/drawing/2010/main" xmlns:ma14="http://schemas.microsoft.com/office/mac/drawingml/2011/main" val="1"/>
+                <ma14:wrappingTextBoxFlag xmlns:ma14="http://schemas.microsoft.com/office/mac/drawingml/2011/main" xmlns:a14="http://schemas.microsoft.com/office/drawing/2010/main" xmlns:m="http://schemas.openxmlformats.org/officeDocument/2006/math" xmlns="" val="1"/>
               </a:ext>
             </a:extLst>
           </p:spPr>
@@ -4620,7 +4624,7 @@
           </a:ln>
           <a:extLst>
             <a:ext uri="{C572A759-6A51-4108-AA02-DFA0A04FC94B}">
-              <ma14:wrappingTextBoxFlag xmlns="" xmlns:m="http://schemas.openxmlformats.org/officeDocument/2006/math" xmlns:a14="http://schemas.microsoft.com/office/drawing/2010/main" xmlns:ma14="http://schemas.microsoft.com/office/mac/drawingml/2011/main" val="1"/>
+              <ma14:wrappingTextBoxFlag xmlns:ma14="http://schemas.microsoft.com/office/mac/drawingml/2011/main" xmlns:a14="http://schemas.microsoft.com/office/drawing/2010/main" xmlns:m="http://schemas.openxmlformats.org/officeDocument/2006/math" xmlns="" val="1"/>
             </a:ext>
           </a:extLst>
         </p:spPr>
@@ -4634,7 +4638,28 @@
               <a:defRPr sz="2000" b="1"/>
             </a:pPr>
             <a:r>
-              <a:t>Группы состояний botState:</a:t>
+              <a:rPr dirty="0" err="1"/>
+              <a:t>Группы</a:t>
+            </a:r>
+            <a:r>
+              <a:rPr dirty="0"/>
+              <a:t> </a:t>
+            </a:r>
+            <a:r>
+              <a:rPr dirty="0" err="1"/>
+              <a:t>состояний</a:t>
+            </a:r>
+            <a:r>
+              <a:rPr dirty="0"/>
+              <a:t> </a:t>
+            </a:r>
+            <a:r>
+              <a:rPr dirty="0" err="1"/>
+              <a:t>botState</a:t>
+            </a:r>
+            <a:r>
+              <a:rPr dirty="0"/>
+              <a:t>:</a:t>
             </a:r>
           </a:p>
           <a:p>
@@ -4642,71 +4667,202 @@
               <a:defRPr sz="2000" b="1"/>
             </a:pPr>
             <a:r>
+              <a:rPr dirty="0"/>
               <a:t>LISTEN</a:t>
             </a:r>
             <a:r>
-              <a:rPr b="0"/>
-              <a:t>: ожидание ответа пользователя</a:t>
-            </a:r>
+              <a:rPr b="0" dirty="0"/>
+              <a:t>: </a:t>
+            </a:r>
+            <a:r>
+              <a:rPr b="0" dirty="0" err="1"/>
+              <a:t>ожидание</a:t>
+            </a:r>
+            <a:r>
+              <a:rPr b="0" dirty="0"/>
+              <a:t> </a:t>
+            </a:r>
+            <a:r>
+              <a:rPr b="0" dirty="0" err="1"/>
+              <a:t>ответа</a:t>
+            </a:r>
+            <a:r>
+              <a:rPr b="0" dirty="0"/>
+              <a:t> </a:t>
+            </a:r>
+            <a:r>
+              <a:rPr b="0" dirty="0" err="1"/>
+              <a:t>пользователя</a:t>
+            </a:r>
+            <a:endParaRPr b="0" dirty="0"/>
           </a:p>
           <a:p>
             <a:pPr>
               <a:defRPr sz="2000" b="1"/>
             </a:pPr>
             <a:r>
+              <a:rPr dirty="0"/>
               <a:t>ANSWER</a:t>
             </a:r>
             <a:r>
-              <a:rPr b="0"/>
-              <a:t>: отправка сообщения пользователю</a:t>
-            </a:r>
+              <a:rPr b="0" dirty="0"/>
+              <a:t>: </a:t>
+            </a:r>
+            <a:r>
+              <a:rPr b="0" dirty="0" err="1"/>
+              <a:t>отправка</a:t>
+            </a:r>
+            <a:r>
+              <a:rPr b="0" dirty="0"/>
+              <a:t> </a:t>
+            </a:r>
+            <a:r>
+              <a:rPr b="0" dirty="0" err="1"/>
+              <a:t>сообщения</a:t>
+            </a:r>
+            <a:r>
+              <a:rPr b="0" dirty="0"/>
+              <a:t> </a:t>
+            </a:r>
+            <a:r>
+              <a:rPr b="0" dirty="0" err="1"/>
+              <a:t>пользователю</a:t>
+            </a:r>
+            <a:endParaRPr b="0" dirty="0"/>
           </a:p>
           <a:p>
             <a:pPr>
               <a:defRPr sz="2000" b="1"/>
             </a:pPr>
             <a:r>
+              <a:rPr dirty="0"/>
               <a:t>DELETE</a:t>
             </a:r>
             <a:r>
-              <a:rPr b="0"/>
-              <a:t>: удаление старого сообщения</a:t>
-            </a:r>
+              <a:rPr b="0" dirty="0"/>
+              <a:t>: </a:t>
+            </a:r>
+            <a:r>
+              <a:rPr b="0" dirty="0" err="1"/>
+              <a:t>удаление</a:t>
+            </a:r>
+            <a:r>
+              <a:rPr b="0" dirty="0"/>
+              <a:t> </a:t>
+            </a:r>
+            <a:r>
+              <a:rPr b="0" dirty="0" err="1"/>
+              <a:t>старого</a:t>
+            </a:r>
+            <a:r>
+              <a:rPr b="0" dirty="0"/>
+              <a:t> </a:t>
+            </a:r>
+            <a:r>
+              <a:rPr b="0" dirty="0" err="1"/>
+              <a:t>сообщения</a:t>
+            </a:r>
+            <a:endParaRPr b="0" dirty="0"/>
           </a:p>
           <a:p>
             <a:pPr>
               <a:defRPr sz="2000"/>
             </a:pPr>
-            <a:endParaRPr b="0"/>
+            <a:endParaRPr b="0" dirty="0"/>
           </a:p>
           <a:p>
             <a:pPr>
               <a:defRPr sz="2000" b="1"/>
             </a:pPr>
             <a:r>
-              <a:t>Группа MessageState</a:t>
-            </a:r>
+              <a:rPr dirty="0" err="1"/>
+              <a:t>Группа</a:t>
+            </a:r>
+            <a:r>
+              <a:rPr dirty="0"/>
+              <a:t> </a:t>
+            </a:r>
+            <a:r>
+              <a:rPr dirty="0" err="1"/>
+              <a:t>MessageState</a:t>
+            </a:r>
+            <a:endParaRPr dirty="0"/>
           </a:p>
           <a:p>
             <a:pPr>
               <a:defRPr sz="2000"/>
             </a:pPr>
             <a:r>
-              <a:t>Определяет тип передаваемого/ожидаемого сообщения</a:t>
-            </a:r>
+              <a:rPr dirty="0" err="1"/>
+              <a:t>Определяет</a:t>
+            </a:r>
+            <a:r>
+              <a:rPr dirty="0"/>
+              <a:t> </a:t>
+            </a:r>
+            <a:r>
+              <a:rPr dirty="0" err="1"/>
+              <a:t>тип</a:t>
+            </a:r>
+            <a:r>
+              <a:rPr dirty="0"/>
+              <a:t> </a:t>
+            </a:r>
+            <a:r>
+              <a:rPr dirty="0" err="1"/>
+              <a:t>передаваемого</a:t>
+            </a:r>
+            <a:r>
+              <a:rPr dirty="0"/>
+              <a:t>/</a:t>
+            </a:r>
+            <a:r>
+              <a:rPr dirty="0" err="1"/>
+              <a:t>ожидаемого</a:t>
+            </a:r>
+            <a:r>
+              <a:rPr dirty="0"/>
+              <a:t> </a:t>
+            </a:r>
+            <a:r>
+              <a:rPr dirty="0" err="1"/>
+              <a:t>сообщения</a:t>
+            </a:r>
+            <a:endParaRPr dirty="0"/>
           </a:p>
           <a:p>
             <a:pPr>
               <a:defRPr sz="2000" b="1"/>
             </a:pPr>
-            <a:endParaRPr/>
+            <a:endParaRPr dirty="0"/>
           </a:p>
           <a:p>
             <a:pPr>
               <a:defRPr sz="2000" b="1"/>
             </a:pPr>
             <a:r>
-              <a:t>Глобальные состояния (MainMenuState):</a:t>
+              <a:rPr dirty="0" err="1"/>
+              <a:t>Глобальные</a:t>
+            </a:r>
+            <a:r>
+              <a:rPr dirty="0"/>
+              <a:t> </a:t>
+            </a:r>
+            <a:r>
+              <a:rPr dirty="0" err="1"/>
+              <a:t>состояния</a:t>
+            </a:r>
+            <a:r>
+              <a:rPr dirty="0"/>
+              <a:t> (</a:t>
+            </a:r>
+            <a:r>
+              <a:rPr dirty="0" err="1"/>
+              <a:t>MainMenuState</a:t>
+            </a:r>
+            <a:r>
+              <a:rPr dirty="0"/>
+              <a:t>):</a:t>
             </a:r>
           </a:p>
           <a:p>
@@ -4714,17 +4870,96 @@
               <a:defRPr sz="2000"/>
             </a:pPr>
             <a:r>
-              <a:t>Обрабатываются всегда: возврат в главное меню, смена языка</a:t>
-            </a:r>
+              <a:rPr dirty="0" err="1"/>
+              <a:t>Обрабатываются</a:t>
+            </a:r>
+            <a:r>
+              <a:rPr dirty="0"/>
+              <a:t> </a:t>
+            </a:r>
+            <a:r>
+              <a:rPr dirty="0" err="1"/>
+              <a:t>всегда</a:t>
+            </a:r>
+            <a:r>
+              <a:rPr dirty="0"/>
+              <a:t>: </a:t>
+            </a:r>
+            <a:r>
+              <a:rPr dirty="0" err="1"/>
+              <a:t>возврат</a:t>
+            </a:r>
+            <a:r>
+              <a:rPr dirty="0"/>
+              <a:t> в </a:t>
+            </a:r>
+            <a:r>
+              <a:rPr dirty="0" err="1"/>
+              <a:t>главное</a:t>
+            </a:r>
+            <a:r>
+              <a:rPr dirty="0"/>
+              <a:t> </a:t>
+            </a:r>
+            <a:r>
+              <a:rPr dirty="0" err="1"/>
+              <a:t>меню</a:t>
+            </a:r>
+            <a:r>
+              <a:rPr dirty="0"/>
+              <a:t>, </a:t>
+            </a:r>
+            <a:r>
+              <a:rPr dirty="0" err="1"/>
+              <a:t>смена</a:t>
+            </a:r>
+            <a:r>
+              <a:rPr dirty="0"/>
+              <a:t> </a:t>
+            </a:r>
+            <a:r>
+              <a:rPr dirty="0" err="1"/>
+              <a:t>языка</a:t>
+            </a:r>
+            <a:endParaRPr dirty="0"/>
+          </a:p>
+        </p:txBody>
+      </p:sp>
+      <p:sp>
+        <p:nvSpPr>
+          <p:cNvPr id="2" name="Slide Number Placeholder 1">
+            <a:extLst>
+              <a:ext uri="{FF2B5EF4-FFF2-40B4-BE49-F238E27FC236}">
+                <a16:creationId xmlns:a16="http://schemas.microsoft.com/office/drawing/2014/main" id="{82D9F64C-AF30-B39F-6DC1-CE2CFBA16472}"/>
+              </a:ext>
+            </a:extLst>
+          </p:cNvPr>
+          <p:cNvSpPr>
+            <a:spLocks noGrp="1"/>
+          </p:cNvSpPr>
+          <p:nvPr>
+            <p:ph type="sldNum" sz="quarter" idx="2"/>
+          </p:nvPr>
+        </p:nvSpPr>
+        <p:spPr/>
+        <p:txBody>
+          <a:bodyPr/>
+          <a:lstStyle/>
+          <a:p>
+            <a:fld id="{86CB4B4D-7CA3-9044-876B-883B54F8677D}" type="slidenum">
+              <a:rPr lang="en-AU" smtClean="0"/>
+              <a:t>10</a:t>
+            </a:fld>
+            <a:endParaRPr lang="en-AU"/>
           </a:p>
         </p:txBody>
       </p:sp>
       <p:pic>
         <p:nvPicPr>
-          <p:cNvPr id="3" name="Picture 2">
+          <p:cNvPr id="5" name="Picture 4">
             <a:extLst>
               <a:ext uri="{FF2B5EF4-FFF2-40B4-BE49-F238E27FC236}">
-                <a16:creationId xmlns:a16="http://schemas.microsoft.com/office/drawing/2014/main" id="{ACA0C273-AC01-7D17-DD25-C6B55878A1DD}"/>
+                <a16:creationId xmlns:a16="http://schemas.microsoft.com/office/drawing/2014/main" id="{D2F5496B-F79D-A933-82C3-44316878FB3C}"/>
               </a:ext>
             </a:extLst>
           </p:cNvPr>
@@ -4741,8 +4976,8 @@
         </p:blipFill>
         <p:spPr>
           <a:xfrm>
-            <a:off x="6829165" y="532996"/>
-            <a:ext cx="3715268" cy="5792008"/>
+            <a:off x="7094279" y="471074"/>
+            <a:ext cx="3705742" cy="5915851"/>
           </a:xfrm>
           <a:prstGeom prst="rect">
             <a:avLst/>
@@ -4759,6 +4994,1274 @@
 </file>
 
 <file path=ppt/slides/slide11.xml><?xml version="1.0" encoding="utf-8"?>
+<p:sld xmlns:a="http://schemas.openxmlformats.org/drawingml/2006/main" xmlns:r="http://schemas.openxmlformats.org/officeDocument/2006/relationships" xmlns:p="http://schemas.openxmlformats.org/presentationml/2006/main">
+  <p:cSld>
+    <p:spTree>
+      <p:nvGrpSpPr>
+        <p:cNvPr id="1" name=""/>
+        <p:cNvGrpSpPr/>
+        <p:nvPr/>
+      </p:nvGrpSpPr>
+      <p:grpSpPr>
+        <a:xfrm>
+          <a:off x="0" y="0"/>
+          <a:ext cx="0" cy="0"/>
+          <a:chOff x="0" y="0"/>
+          <a:chExt cx="0" cy="0"/>
+        </a:xfrm>
+      </p:grpSpPr>
+      <p:sp>
+        <p:nvSpPr>
+          <p:cNvPr id="2" name="Slide Number Placeholder 1">
+            <a:extLst>
+              <a:ext uri="{FF2B5EF4-FFF2-40B4-BE49-F238E27FC236}">
+                <a16:creationId xmlns:a16="http://schemas.microsoft.com/office/drawing/2014/main" id="{5540D064-322C-DF9E-E268-A17C0A989334}"/>
+              </a:ext>
+            </a:extLst>
+          </p:cNvPr>
+          <p:cNvSpPr>
+            <a:spLocks noGrp="1"/>
+          </p:cNvSpPr>
+          <p:nvPr>
+            <p:ph type="sldNum" sz="quarter" idx="2"/>
+          </p:nvPr>
+        </p:nvSpPr>
+        <p:spPr/>
+        <p:txBody>
+          <a:bodyPr/>
+          <a:lstStyle/>
+          <a:p>
+            <a:fld id="{86CB4B4D-7CA3-9044-876B-883B54F8677D}" type="slidenum">
+              <a:rPr lang="en-AU" smtClean="0"/>
+              <a:t>11</a:t>
+            </a:fld>
+            <a:endParaRPr lang="en-AU"/>
+          </a:p>
+        </p:txBody>
+      </p:sp>
+      <p:grpSp>
+        <p:nvGrpSpPr>
+          <p:cNvPr id="3" name="Title">
+            <a:extLst>
+              <a:ext uri="{FF2B5EF4-FFF2-40B4-BE49-F238E27FC236}">
+                <a16:creationId xmlns:a16="http://schemas.microsoft.com/office/drawing/2014/main" id="{658E7016-081B-0C24-1ED6-65EB1265AF43}"/>
+              </a:ext>
+            </a:extLst>
+          </p:cNvPr>
+          <p:cNvGrpSpPr/>
+          <p:nvPr/>
+        </p:nvGrpSpPr>
+        <p:grpSpPr>
+          <a:xfrm>
+            <a:off x="457200" y="238506"/>
+            <a:ext cx="8229600" cy="584773"/>
+            <a:chOff x="0" y="-23431"/>
+            <a:chExt cx="8229600" cy="584771"/>
+          </a:xfrm>
+        </p:grpSpPr>
+        <p:sp>
+          <p:nvSpPr>
+            <p:cNvPr id="4" name="Rectangle">
+              <a:extLst>
+                <a:ext uri="{FF2B5EF4-FFF2-40B4-BE49-F238E27FC236}">
+                  <a16:creationId xmlns:a16="http://schemas.microsoft.com/office/drawing/2014/main" id="{33362D8B-C296-D979-36C5-7BD2087CAD5C}"/>
+                </a:ext>
+              </a:extLst>
+            </p:cNvPr>
+            <p:cNvSpPr/>
+            <p:nvPr/>
+          </p:nvSpPr>
+          <p:spPr>
+            <a:xfrm>
+              <a:off x="0" y="12699"/>
+              <a:ext cx="8229600" cy="548641"/>
+            </a:xfrm>
+            <a:prstGeom prst="rect">
+              <a:avLst/>
+            </a:prstGeom>
+            <a:noFill/>
+            <a:ln w="12700" cap="flat">
+              <a:solidFill>
+                <a:srgbClr val="FFFFFF"/>
+              </a:solidFill>
+              <a:prstDash val="solid"/>
+              <a:round/>
+            </a:ln>
+            <a:effectLst/>
+          </p:spPr>
+          <p:txBody>
+            <a:bodyPr wrap="square" lIns="45719" tIns="45719" rIns="45719" bIns="45719" numCol="1" anchor="ctr">
+              <a:noAutofit/>
+            </a:bodyPr>
+            <a:lstStyle/>
+            <a:p>
+              <a:endParaRPr/>
+            </a:p>
+          </p:txBody>
+        </p:sp>
+        <p:sp>
+          <p:nvSpPr>
+            <p:cNvPr id="5" name="Сервис Telegram-бота">
+              <a:extLst>
+                <a:ext uri="{FF2B5EF4-FFF2-40B4-BE49-F238E27FC236}">
+                  <a16:creationId xmlns:a16="http://schemas.microsoft.com/office/drawing/2014/main" id="{83FC4DC6-DB9E-AF93-C7E2-419AACB0EC12}"/>
+                </a:ext>
+              </a:extLst>
+            </p:cNvPr>
+            <p:cNvSpPr txBox="1"/>
+            <p:nvPr/>
+          </p:nvSpPr>
+          <p:spPr>
+            <a:xfrm>
+              <a:off x="52069" y="-23431"/>
+              <a:ext cx="8125461" cy="584771"/>
+            </a:xfrm>
+            <a:prstGeom prst="rect">
+              <a:avLst/>
+            </a:prstGeom>
+            <a:noFill/>
+            <a:ln w="12700" cap="flat">
+              <a:noFill/>
+              <a:miter lim="400000"/>
+            </a:ln>
+            <a:effectLst/>
+            <a:extLst>
+              <a:ext uri="{C572A759-6A51-4108-AA02-DFA0A04FC94B}">
+                <ma14:wrappingTextBoxFlag xmlns:ma14="http://schemas.microsoft.com/office/mac/drawingml/2011/main" xmlns:a14="http://schemas.microsoft.com/office/drawing/2010/main" xmlns:m="http://schemas.openxmlformats.org/officeDocument/2006/math" xmlns="" val="1"/>
+              </a:ext>
+            </a:extLst>
+          </p:spPr>
+          <p:txBody>
+            <a:bodyPr wrap="square" lIns="45719" tIns="45719" rIns="45719" bIns="45719" numCol="1" anchor="ctr">
+              <a:spAutoFit/>
+            </a:bodyPr>
+            <a:lstStyle>
+              <a:lvl1pPr>
+                <a:defRPr sz="3200" b="1"/>
+              </a:lvl1pPr>
+            </a:lstStyle>
+            <a:p>
+              <a:pPr marL="0" marR="0" indent="0" algn="l" defTabSz="914400" rtl="0" fontAlgn="auto" latinLnBrk="0" hangingPunct="0">
+                <a:lnSpc>
+                  <a:spcPct val="100000"/>
+                </a:lnSpc>
+                <a:spcBef>
+                  <a:spcPts val="0"/>
+                </a:spcBef>
+                <a:spcAft>
+                  <a:spcPts val="0"/>
+                </a:spcAft>
+                <a:buClrTx/>
+                <a:buSzTx/>
+                <a:buFontTx/>
+                <a:buNone/>
+                <a:tabLst/>
+              </a:pPr>
+              <a:r>
+                <a:rPr kumimoji="0" lang="ru-RU" sz="3200" i="0" u="none" strike="noStrike" cap="none" spc="0" normalizeH="0" baseline="0" dirty="0">
+                  <a:ln>
+                    <a:noFill/>
+                  </a:ln>
+                  <a:solidFill>
+                    <a:srgbClr val="000000"/>
+                  </a:solidFill>
+                  <a:effectLst/>
+                  <a:uFillTx/>
+                  <a:latin typeface="+mn-lt"/>
+                  <a:ea typeface="+mn-ea"/>
+                  <a:cs typeface="+mn-cs"/>
+                  <a:sym typeface="Aptos"/>
+                </a:rPr>
+                <a:t>Безопасность</a:t>
+              </a:r>
+              <a:endParaRPr kumimoji="0" lang="en-AU" sz="3200" i="0" u="none" strike="noStrike" cap="none" spc="0" normalizeH="0" baseline="0" dirty="0">
+                <a:ln>
+                  <a:noFill/>
+                </a:ln>
+                <a:solidFill>
+                  <a:srgbClr val="000000"/>
+                </a:solidFill>
+                <a:effectLst/>
+                <a:uFillTx/>
+                <a:latin typeface="+mn-lt"/>
+                <a:ea typeface="+mn-ea"/>
+                <a:cs typeface="+mn-cs"/>
+                <a:sym typeface="Aptos"/>
+              </a:endParaRPr>
+            </a:p>
+          </p:txBody>
+        </p:sp>
+      </p:grpSp>
+      <p:sp>
+        <p:nvSpPr>
+          <p:cNvPr id="9" name="Right">
+            <a:extLst>
+              <a:ext uri="{FF2B5EF4-FFF2-40B4-BE49-F238E27FC236}">
+                <a16:creationId xmlns:a16="http://schemas.microsoft.com/office/drawing/2014/main" id="{445DA7A4-F611-4331-FA53-FF20F979F0B5}"/>
+              </a:ext>
+            </a:extLst>
+          </p:cNvPr>
+          <p:cNvSpPr txBox="1"/>
+          <p:nvPr/>
+        </p:nvSpPr>
+        <p:spPr>
+          <a:xfrm>
+            <a:off x="457200" y="1978315"/>
+            <a:ext cx="4602481" cy="2901370"/>
+          </a:xfrm>
+          <a:prstGeom prst="rect">
+            <a:avLst/>
+          </a:prstGeom>
+          <a:ln w="12700">
+            <a:miter lim="400000"/>
+          </a:ln>
+          <a:extLst>
+            <a:ext uri="{C572A759-6A51-4108-AA02-DFA0A04FC94B}">
+              <ma14:wrappingTextBoxFlag xmlns:ma14="http://schemas.microsoft.com/office/mac/drawingml/2011/main" xmlns:a14="http://schemas.microsoft.com/office/drawing/2010/main" xmlns:m="http://schemas.openxmlformats.org/officeDocument/2006/math" xmlns="" val="1"/>
+            </a:ext>
+          </a:extLst>
+        </p:spPr>
+        <p:txBody>
+          <a:bodyPr wrap="square" tIns="91439" bIns="91439">
+            <a:spAutoFit/>
+          </a:bodyPr>
+          <a:lstStyle/>
+          <a:p>
+            <a:pPr marL="342900" indent="-342900">
+              <a:lnSpc>
+                <a:spcPct val="150000"/>
+              </a:lnSpc>
+              <a:buSzPct val="100000"/>
+              <a:buFont typeface="Arial" panose="020B0604020202020204" pitchFamily="34" charset="0"/>
+              <a:buChar char="•"/>
+              <a:defRPr sz="2400"/>
+            </a:pPr>
+            <a:r>
+              <a:rPr lang="ru-RU" dirty="0"/>
+              <a:t>Для аутентицикации используется </a:t>
+            </a:r>
+            <a:r>
+              <a:rPr lang="en-US" dirty="0"/>
+              <a:t>JWT</a:t>
+            </a:r>
+            <a:r>
+              <a:rPr lang="ru-RU" dirty="0"/>
+              <a:t>-токены </a:t>
+            </a:r>
+            <a:r>
+              <a:rPr lang="en-US" dirty="0"/>
+              <a:t>(RSA-256)</a:t>
+            </a:r>
+          </a:p>
+          <a:p>
+            <a:pPr marL="342900" indent="-342900">
+              <a:lnSpc>
+                <a:spcPct val="150000"/>
+              </a:lnSpc>
+              <a:buSzPct val="100000"/>
+              <a:buFont typeface="Arial" panose="020B0604020202020204" pitchFamily="34" charset="0"/>
+              <a:buChar char="•"/>
+              <a:defRPr sz="2400"/>
+            </a:pPr>
+            <a:r>
+              <a:rPr lang="ru-RU" dirty="0"/>
+              <a:t>Хэширование паролей через </a:t>
+            </a:r>
+            <a:r>
+              <a:rPr lang="en-US" dirty="0" err="1"/>
+              <a:t>BCrypt</a:t>
+            </a:r>
+            <a:endParaRPr dirty="0"/>
+          </a:p>
+        </p:txBody>
+      </p:sp>
+      <p:pic>
+        <p:nvPicPr>
+          <p:cNvPr id="3074" name="Picture 2" descr="Токен авторизации на примере JSON WEB Token / Хабр">
+            <a:extLst>
+              <a:ext uri="{FF2B5EF4-FFF2-40B4-BE49-F238E27FC236}">
+                <a16:creationId xmlns:a16="http://schemas.microsoft.com/office/drawing/2014/main" id="{20033BA2-0CCD-FD9F-AA1F-5ABEDD4E69DE}"/>
+              </a:ext>
+            </a:extLst>
+          </p:cNvPr>
+          <p:cNvPicPr>
+            <a:picLocks noChangeAspect="1" noChangeArrowheads="1"/>
+          </p:cNvPicPr>
+          <p:nvPr/>
+        </p:nvPicPr>
+        <p:blipFill>
+          <a:blip r:embed="rId2">
+            <a:extLst>
+              <a:ext uri="{28A0092B-C50C-407E-A947-70E740481C1C}">
+                <a14:useLocalDpi xmlns:a14="http://schemas.microsoft.com/office/drawing/2010/main" val="0"/>
+              </a:ext>
+            </a:extLst>
+          </a:blip>
+          <a:srcRect/>
+          <a:stretch>
+            <a:fillRect/>
+          </a:stretch>
+        </p:blipFill>
+        <p:spPr bwMode="auto">
+          <a:xfrm>
+            <a:off x="5388049" y="1567112"/>
+            <a:ext cx="6493362" cy="3601787"/>
+          </a:xfrm>
+          <a:prstGeom prst="rect">
+            <a:avLst/>
+          </a:prstGeom>
+          <a:noFill/>
+          <a:extLst>
+            <a:ext uri="{909E8E84-426E-40DD-AFC4-6F175D3DCCD1}">
+              <a14:hiddenFill xmlns:a14="http://schemas.microsoft.com/office/drawing/2010/main">
+                <a:solidFill>
+                  <a:srgbClr val="FFFFFF"/>
+                </a:solidFill>
+              </a14:hiddenFill>
+            </a:ext>
+          </a:extLst>
+        </p:spPr>
+      </p:pic>
+    </p:spTree>
+    <p:extLst>
+      <p:ext uri="{BB962C8B-B14F-4D97-AF65-F5344CB8AC3E}">
+        <p14:creationId xmlns:p14="http://schemas.microsoft.com/office/powerpoint/2010/main" val="1572509604"/>
+      </p:ext>
+    </p:extLst>
+  </p:cSld>
+  <p:clrMapOvr>
+    <a:masterClrMapping/>
+  </p:clrMapOvr>
+  <p:transition spd="med"/>
+</p:sld>
+</file>
+
+<file path=ppt/slides/slide12.xml><?xml version="1.0" encoding="utf-8"?>
+<p:sld xmlns:a="http://schemas.openxmlformats.org/drawingml/2006/main" xmlns:r="http://schemas.openxmlformats.org/officeDocument/2006/relationships" xmlns:p="http://schemas.openxmlformats.org/presentationml/2006/main">
+  <p:cSld>
+    <p:spTree>
+      <p:nvGrpSpPr>
+        <p:cNvPr id="1" name=""/>
+        <p:cNvGrpSpPr/>
+        <p:nvPr/>
+      </p:nvGrpSpPr>
+      <p:grpSpPr>
+        <a:xfrm>
+          <a:off x="0" y="0"/>
+          <a:ext cx="0" cy="0"/>
+          <a:chOff x="0" y="0"/>
+          <a:chExt cx="0" cy="0"/>
+        </a:xfrm>
+      </p:grpSpPr>
+      <p:sp>
+        <p:nvSpPr>
+          <p:cNvPr id="2" name="Slide Number Placeholder 1">
+            <a:extLst>
+              <a:ext uri="{FF2B5EF4-FFF2-40B4-BE49-F238E27FC236}">
+                <a16:creationId xmlns:a16="http://schemas.microsoft.com/office/drawing/2014/main" id="{1909E189-8E7F-254F-5D34-FCB302BFE4C7}"/>
+              </a:ext>
+            </a:extLst>
+          </p:cNvPr>
+          <p:cNvSpPr>
+            <a:spLocks noGrp="1"/>
+          </p:cNvSpPr>
+          <p:nvPr>
+            <p:ph type="sldNum" sz="quarter" idx="2"/>
+          </p:nvPr>
+        </p:nvSpPr>
+        <p:spPr/>
+        <p:txBody>
+          <a:bodyPr/>
+          <a:lstStyle/>
+          <a:p>
+            <a:fld id="{86CB4B4D-7CA3-9044-876B-883B54F8677D}" type="slidenum">
+              <a:rPr lang="en-AU" smtClean="0"/>
+              <a:t>12</a:t>
+            </a:fld>
+            <a:endParaRPr lang="en-AU"/>
+          </a:p>
+        </p:txBody>
+      </p:sp>
+      <p:grpSp>
+        <p:nvGrpSpPr>
+          <p:cNvPr id="4" name="Title">
+            <a:extLst>
+              <a:ext uri="{FF2B5EF4-FFF2-40B4-BE49-F238E27FC236}">
+                <a16:creationId xmlns:a16="http://schemas.microsoft.com/office/drawing/2014/main" id="{1F5D9A92-53DD-9804-613F-68F88C8B468F}"/>
+              </a:ext>
+            </a:extLst>
+          </p:cNvPr>
+          <p:cNvGrpSpPr/>
+          <p:nvPr/>
+        </p:nvGrpSpPr>
+        <p:grpSpPr>
+          <a:xfrm>
+            <a:off x="457200" y="238506"/>
+            <a:ext cx="8229600" cy="584773"/>
+            <a:chOff x="0" y="-23431"/>
+            <a:chExt cx="8229600" cy="584771"/>
+          </a:xfrm>
+        </p:grpSpPr>
+        <p:sp>
+          <p:nvSpPr>
+            <p:cNvPr id="5" name="Rectangle">
+              <a:extLst>
+                <a:ext uri="{FF2B5EF4-FFF2-40B4-BE49-F238E27FC236}">
+                  <a16:creationId xmlns:a16="http://schemas.microsoft.com/office/drawing/2014/main" id="{3E274DB4-1948-8C9F-6F59-E8503ACF5523}"/>
+                </a:ext>
+              </a:extLst>
+            </p:cNvPr>
+            <p:cNvSpPr/>
+            <p:nvPr/>
+          </p:nvSpPr>
+          <p:spPr>
+            <a:xfrm>
+              <a:off x="0" y="12699"/>
+              <a:ext cx="8229600" cy="548641"/>
+            </a:xfrm>
+            <a:prstGeom prst="rect">
+              <a:avLst/>
+            </a:prstGeom>
+            <a:noFill/>
+            <a:ln w="12700" cap="flat">
+              <a:solidFill>
+                <a:srgbClr val="FFFFFF"/>
+              </a:solidFill>
+              <a:prstDash val="solid"/>
+              <a:round/>
+            </a:ln>
+            <a:effectLst/>
+          </p:spPr>
+          <p:txBody>
+            <a:bodyPr wrap="square" lIns="45719" tIns="45719" rIns="45719" bIns="45719" numCol="1" anchor="ctr">
+              <a:noAutofit/>
+            </a:bodyPr>
+            <a:lstStyle/>
+            <a:p>
+              <a:endParaRPr/>
+            </a:p>
+          </p:txBody>
+        </p:sp>
+        <p:sp>
+          <p:nvSpPr>
+            <p:cNvPr id="6" name="Сервис Telegram-бота">
+              <a:extLst>
+                <a:ext uri="{FF2B5EF4-FFF2-40B4-BE49-F238E27FC236}">
+                  <a16:creationId xmlns:a16="http://schemas.microsoft.com/office/drawing/2014/main" id="{746132A3-CF24-82EB-4B7D-38E422D28550}"/>
+                </a:ext>
+              </a:extLst>
+            </p:cNvPr>
+            <p:cNvSpPr txBox="1"/>
+            <p:nvPr/>
+          </p:nvSpPr>
+          <p:spPr>
+            <a:xfrm>
+              <a:off x="52069" y="-23431"/>
+              <a:ext cx="8125461" cy="584771"/>
+            </a:xfrm>
+            <a:prstGeom prst="rect">
+              <a:avLst/>
+            </a:prstGeom>
+            <a:noFill/>
+            <a:ln w="12700" cap="flat">
+              <a:noFill/>
+              <a:miter lim="400000"/>
+            </a:ln>
+            <a:effectLst/>
+            <a:extLst>
+              <a:ext uri="{C572A759-6A51-4108-AA02-DFA0A04FC94B}">
+                <ma14:wrappingTextBoxFlag xmlns:ma14="http://schemas.microsoft.com/office/mac/drawingml/2011/main" xmlns:a14="http://schemas.microsoft.com/office/drawing/2010/main" xmlns:m="http://schemas.openxmlformats.org/officeDocument/2006/math" xmlns="" val="1"/>
+              </a:ext>
+            </a:extLst>
+          </p:spPr>
+          <p:txBody>
+            <a:bodyPr wrap="square" lIns="45719" tIns="45719" rIns="45719" bIns="45719" numCol="1" anchor="ctr">
+              <a:spAutoFit/>
+            </a:bodyPr>
+            <a:lstStyle>
+              <a:lvl1pPr>
+                <a:defRPr sz="3200" b="1"/>
+              </a:lvl1pPr>
+            </a:lstStyle>
+            <a:p>
+              <a:pPr marL="0" marR="0" indent="0" algn="l" defTabSz="914400" rtl="0" fontAlgn="auto" latinLnBrk="0" hangingPunct="0">
+                <a:lnSpc>
+                  <a:spcPct val="100000"/>
+                </a:lnSpc>
+                <a:spcBef>
+                  <a:spcPts val="0"/>
+                </a:spcBef>
+                <a:spcAft>
+                  <a:spcPts val="0"/>
+                </a:spcAft>
+                <a:buClrTx/>
+                <a:buSzTx/>
+                <a:buFontTx/>
+                <a:buNone/>
+                <a:tabLst/>
+              </a:pPr>
+              <a:r>
+                <a:rPr kumimoji="0" lang="ru-RU" sz="3200" i="0" u="none" strike="noStrike" cap="none" spc="0" normalizeH="0" baseline="0" dirty="0">
+                  <a:ln>
+                    <a:noFill/>
+                  </a:ln>
+                  <a:solidFill>
+                    <a:srgbClr val="000000"/>
+                  </a:solidFill>
+                  <a:effectLst/>
+                  <a:uFillTx/>
+                  <a:latin typeface="+mn-lt"/>
+                  <a:ea typeface="+mn-ea"/>
+                  <a:cs typeface="+mn-cs"/>
+                  <a:sym typeface="Aptos"/>
+                </a:rPr>
+                <a:t>Поддержка языков</a:t>
+              </a:r>
+              <a:endParaRPr kumimoji="0" lang="en-AU" sz="3200" i="0" u="none" strike="noStrike" cap="none" spc="0" normalizeH="0" baseline="0" dirty="0">
+                <a:ln>
+                  <a:noFill/>
+                </a:ln>
+                <a:solidFill>
+                  <a:srgbClr val="000000"/>
+                </a:solidFill>
+                <a:effectLst/>
+                <a:uFillTx/>
+                <a:latin typeface="+mn-lt"/>
+                <a:ea typeface="+mn-ea"/>
+                <a:cs typeface="+mn-cs"/>
+                <a:sym typeface="Aptos"/>
+              </a:endParaRPr>
+            </a:p>
+          </p:txBody>
+        </p:sp>
+      </p:grpSp>
+      <p:sp>
+        <p:nvSpPr>
+          <p:cNvPr id="12" name="Right">
+            <a:extLst>
+              <a:ext uri="{FF2B5EF4-FFF2-40B4-BE49-F238E27FC236}">
+                <a16:creationId xmlns:a16="http://schemas.microsoft.com/office/drawing/2014/main" id="{B4E61D36-BAAF-F654-C961-F5ADD2F06763}"/>
+              </a:ext>
+            </a:extLst>
+          </p:cNvPr>
+          <p:cNvSpPr txBox="1"/>
+          <p:nvPr/>
+        </p:nvSpPr>
+        <p:spPr>
+          <a:xfrm>
+            <a:off x="509269" y="1978315"/>
+            <a:ext cx="5156949" cy="2901370"/>
+          </a:xfrm>
+          <a:prstGeom prst="rect">
+            <a:avLst/>
+          </a:prstGeom>
+          <a:ln w="12700">
+            <a:miter lim="400000"/>
+          </a:ln>
+          <a:extLst>
+            <a:ext uri="{C572A759-6A51-4108-AA02-DFA0A04FC94B}">
+              <ma14:wrappingTextBoxFlag xmlns:ma14="http://schemas.microsoft.com/office/mac/drawingml/2011/main" xmlns:a14="http://schemas.microsoft.com/office/drawing/2010/main" xmlns:m="http://schemas.openxmlformats.org/officeDocument/2006/math" xmlns="" val="1"/>
+            </a:ext>
+          </a:extLst>
+        </p:spPr>
+        <p:txBody>
+          <a:bodyPr tIns="91439" bIns="91439">
+            <a:spAutoFit/>
+          </a:bodyPr>
+          <a:lstStyle/>
+          <a:p>
+            <a:pPr marL="342900" indent="-342900">
+              <a:lnSpc>
+                <a:spcPct val="150000"/>
+              </a:lnSpc>
+              <a:buSzPct val="100000"/>
+              <a:buFont typeface="Arial"/>
+              <a:buChar char="•"/>
+              <a:defRPr sz="2400"/>
+            </a:pPr>
+            <a:r>
+              <a:rPr lang="ru-RU" dirty="0"/>
+              <a:t>Русский</a:t>
+            </a:r>
+          </a:p>
+          <a:p>
+            <a:pPr marL="342900" indent="-342900">
+              <a:lnSpc>
+                <a:spcPct val="150000"/>
+              </a:lnSpc>
+              <a:buSzPct val="100000"/>
+              <a:buFont typeface="Arial"/>
+              <a:buChar char="•"/>
+              <a:defRPr sz="2400"/>
+            </a:pPr>
+            <a:r>
+              <a:rPr lang="ru-RU" dirty="0"/>
+              <a:t>Английский</a:t>
+            </a:r>
+          </a:p>
+          <a:p>
+            <a:pPr marL="342900" indent="-342900">
+              <a:lnSpc>
+                <a:spcPct val="150000"/>
+              </a:lnSpc>
+              <a:buSzPct val="100000"/>
+              <a:buFont typeface="Arial"/>
+              <a:buChar char="•"/>
+              <a:defRPr sz="2400"/>
+            </a:pPr>
+            <a:r>
+              <a:rPr lang="ru-RU" dirty="0"/>
+              <a:t>Французский</a:t>
+            </a:r>
+          </a:p>
+          <a:p>
+            <a:pPr marL="342900" indent="-342900">
+              <a:lnSpc>
+                <a:spcPct val="150000"/>
+              </a:lnSpc>
+              <a:buSzPct val="100000"/>
+              <a:buFont typeface="Arial"/>
+              <a:buChar char="•"/>
+              <a:defRPr sz="2400"/>
+            </a:pPr>
+            <a:r>
+              <a:rPr lang="ru-RU" dirty="0"/>
+              <a:t>Испанский</a:t>
+            </a:r>
+          </a:p>
+          <a:p>
+            <a:pPr marL="342900" indent="-342900">
+              <a:lnSpc>
+                <a:spcPct val="150000"/>
+              </a:lnSpc>
+              <a:buSzPct val="100000"/>
+              <a:buFont typeface="Arial"/>
+              <a:buChar char="•"/>
+              <a:defRPr sz="2400"/>
+            </a:pPr>
+            <a:r>
+              <a:rPr lang="ru-RU" dirty="0"/>
+              <a:t>Китайский</a:t>
+            </a:r>
+            <a:endParaRPr dirty="0"/>
+          </a:p>
+        </p:txBody>
+      </p:sp>
+      <p:pic>
+        <p:nvPicPr>
+          <p:cNvPr id="1046" name="Picture 22" descr="Флаг">
+            <a:extLst>
+              <a:ext uri="{FF2B5EF4-FFF2-40B4-BE49-F238E27FC236}">
+                <a16:creationId xmlns:a16="http://schemas.microsoft.com/office/drawing/2014/main" id="{5F214CC3-3517-61EE-C9EF-787848AA0BBF}"/>
+              </a:ext>
+            </a:extLst>
+          </p:cNvPr>
+          <p:cNvPicPr>
+            <a:picLocks noChangeAspect="1" noChangeArrowheads="1"/>
+          </p:cNvPicPr>
+          <p:nvPr/>
+        </p:nvPicPr>
+        <p:blipFill>
+          <a:blip r:embed="rId2">
+            <a:extLst>
+              <a:ext uri="{28A0092B-C50C-407E-A947-70E740481C1C}">
+                <a14:useLocalDpi xmlns:a14="http://schemas.microsoft.com/office/drawing/2010/main" val="0"/>
+              </a:ext>
+            </a:extLst>
+          </a:blip>
+          <a:srcRect/>
+          <a:stretch>
+            <a:fillRect/>
+          </a:stretch>
+        </p:blipFill>
+        <p:spPr bwMode="auto">
+          <a:xfrm>
+            <a:off x="9037209" y="4404691"/>
+            <a:ext cx="2381250" cy="1190625"/>
+          </a:xfrm>
+          <a:prstGeom prst="rect">
+            <a:avLst/>
+          </a:prstGeom>
+          <a:noFill/>
+          <a:ln>
+            <a:solidFill>
+              <a:schemeClr val="tx1"/>
+            </a:solidFill>
+          </a:ln>
+          <a:extLst>
+            <a:ext uri="{909E8E84-426E-40DD-AFC4-6F175D3DCCD1}">
+              <a14:hiddenFill xmlns:a14="http://schemas.microsoft.com/office/drawing/2010/main">
+                <a:solidFill>
+                  <a:srgbClr val="FFFFFF"/>
+                </a:solidFill>
+              </a14:hiddenFill>
+            </a:ext>
+          </a:extLst>
+        </p:spPr>
+      </p:pic>
+      <p:pic>
+        <p:nvPicPr>
+          <p:cNvPr id="1048" name="Picture 24" descr="Флаг">
+            <a:extLst>
+              <a:ext uri="{FF2B5EF4-FFF2-40B4-BE49-F238E27FC236}">
+                <a16:creationId xmlns:a16="http://schemas.microsoft.com/office/drawing/2014/main" id="{D88AA5CA-805A-D3F4-CE30-0DBF6344BC6B}"/>
+              </a:ext>
+            </a:extLst>
+          </p:cNvPr>
+          <p:cNvPicPr>
+            <a:picLocks noChangeAspect="1" noChangeArrowheads="1"/>
+          </p:cNvPicPr>
+          <p:nvPr/>
+        </p:nvPicPr>
+        <p:blipFill>
+          <a:blip r:embed="rId3">
+            <a:extLst>
+              <a:ext uri="{28A0092B-C50C-407E-A947-70E740481C1C}">
+                <a14:useLocalDpi xmlns:a14="http://schemas.microsoft.com/office/drawing/2010/main" val="0"/>
+              </a:ext>
+            </a:extLst>
+          </a:blip>
+          <a:srcRect/>
+          <a:stretch>
+            <a:fillRect/>
+          </a:stretch>
+        </p:blipFill>
+        <p:spPr bwMode="auto">
+          <a:xfrm>
+            <a:off x="6496208" y="885278"/>
+            <a:ext cx="2381250" cy="1590675"/>
+          </a:xfrm>
+          <a:prstGeom prst="rect">
+            <a:avLst/>
+          </a:prstGeom>
+          <a:noFill/>
+          <a:ln>
+            <a:solidFill>
+              <a:schemeClr val="tx1"/>
+            </a:solidFill>
+          </a:ln>
+          <a:extLst>
+            <a:ext uri="{909E8E84-426E-40DD-AFC4-6F175D3DCCD1}">
+              <a14:hiddenFill xmlns:a14="http://schemas.microsoft.com/office/drawing/2010/main">
+                <a:solidFill>
+                  <a:srgbClr val="FFFFFF"/>
+                </a:solidFill>
+              </a14:hiddenFill>
+            </a:ext>
+          </a:extLst>
+        </p:spPr>
+      </p:pic>
+      <p:pic>
+        <p:nvPicPr>
+          <p:cNvPr id="1052" name="Picture 28" descr="Флаг">
+            <a:extLst>
+              <a:ext uri="{FF2B5EF4-FFF2-40B4-BE49-F238E27FC236}">
+                <a16:creationId xmlns:a16="http://schemas.microsoft.com/office/drawing/2014/main" id="{C5F2D5A8-146E-C7E0-43B6-1FFCFDC597A1}"/>
+              </a:ext>
+            </a:extLst>
+          </p:cNvPr>
+          <p:cNvPicPr>
+            <a:picLocks noChangeAspect="1" noChangeArrowheads="1"/>
+          </p:cNvPicPr>
+          <p:nvPr/>
+        </p:nvPicPr>
+        <p:blipFill>
+          <a:blip r:embed="rId4">
+            <a:extLst>
+              <a:ext uri="{28A0092B-C50C-407E-A947-70E740481C1C}">
+                <a14:useLocalDpi xmlns:a14="http://schemas.microsoft.com/office/drawing/2010/main" val="0"/>
+              </a:ext>
+            </a:extLst>
+          </a:blip>
+          <a:srcRect/>
+          <a:stretch>
+            <a:fillRect/>
+          </a:stretch>
+        </p:blipFill>
+        <p:spPr bwMode="auto">
+          <a:xfrm>
+            <a:off x="9120186" y="1813891"/>
+            <a:ext cx="2381250" cy="1590675"/>
+          </a:xfrm>
+          <a:prstGeom prst="rect">
+            <a:avLst/>
+          </a:prstGeom>
+          <a:noFill/>
+          <a:ln>
+            <a:solidFill>
+              <a:schemeClr val="tx1"/>
+            </a:solidFill>
+          </a:ln>
+          <a:extLst>
+            <a:ext uri="{909E8E84-426E-40DD-AFC4-6F175D3DCCD1}">
+              <a14:hiddenFill xmlns:a14="http://schemas.microsoft.com/office/drawing/2010/main">
+                <a:solidFill>
+                  <a:srgbClr val="FFFFFF"/>
+                </a:solidFill>
+              </a14:hiddenFill>
+            </a:ext>
+          </a:extLst>
+        </p:spPr>
+      </p:pic>
+      <p:pic>
+        <p:nvPicPr>
+          <p:cNvPr id="1050" name="Picture 26" descr="Флаг">
+            <a:extLst>
+              <a:ext uri="{FF2B5EF4-FFF2-40B4-BE49-F238E27FC236}">
+                <a16:creationId xmlns:a16="http://schemas.microsoft.com/office/drawing/2014/main" id="{C5EBC2B2-20BE-B3BD-C2D0-2D0180ED6A09}"/>
+              </a:ext>
+            </a:extLst>
+          </p:cNvPr>
+          <p:cNvPicPr>
+            <a:picLocks noChangeAspect="1" noChangeArrowheads="1"/>
+          </p:cNvPicPr>
+          <p:nvPr/>
+        </p:nvPicPr>
+        <p:blipFill>
+          <a:blip r:embed="rId5">
+            <a:extLst>
+              <a:ext uri="{28A0092B-C50C-407E-A947-70E740481C1C}">
+                <a14:useLocalDpi xmlns:a14="http://schemas.microsoft.com/office/drawing/2010/main" val="0"/>
+              </a:ext>
+            </a:extLst>
+          </a:blip>
+          <a:srcRect/>
+          <a:stretch>
+            <a:fillRect/>
+          </a:stretch>
+        </p:blipFill>
+        <p:spPr bwMode="auto">
+          <a:xfrm>
+            <a:off x="6305550" y="4627891"/>
+            <a:ext cx="2381250" cy="1590675"/>
+          </a:xfrm>
+          <a:prstGeom prst="rect">
+            <a:avLst/>
+          </a:prstGeom>
+          <a:noFill/>
+          <a:ln>
+            <a:solidFill>
+              <a:schemeClr val="tx1"/>
+            </a:solidFill>
+          </a:ln>
+          <a:extLst>
+            <a:ext uri="{909E8E84-426E-40DD-AFC4-6F175D3DCCD1}">
+              <a14:hiddenFill xmlns:a14="http://schemas.microsoft.com/office/drawing/2010/main">
+                <a:solidFill>
+                  <a:srgbClr val="FFFFFF"/>
+                </a:solidFill>
+              </a14:hiddenFill>
+            </a:ext>
+          </a:extLst>
+        </p:spPr>
+      </p:pic>
+      <p:pic>
+        <p:nvPicPr>
+          <p:cNvPr id="1044" name="Picture 20" descr="Флаг">
+            <a:extLst>
+              <a:ext uri="{FF2B5EF4-FFF2-40B4-BE49-F238E27FC236}">
+                <a16:creationId xmlns:a16="http://schemas.microsoft.com/office/drawing/2014/main" id="{C539316D-7267-87AC-4EE1-1F383CA348AA}"/>
+              </a:ext>
+            </a:extLst>
+          </p:cNvPr>
+          <p:cNvPicPr>
+            <a:picLocks noChangeAspect="1" noChangeArrowheads="1"/>
+          </p:cNvPicPr>
+          <p:nvPr/>
+        </p:nvPicPr>
+        <p:blipFill>
+          <a:blip r:embed="rId6">
+            <a:extLst>
+              <a:ext uri="{28A0092B-C50C-407E-A947-70E740481C1C}">
+                <a14:useLocalDpi xmlns:a14="http://schemas.microsoft.com/office/drawing/2010/main" val="0"/>
+              </a:ext>
+            </a:extLst>
+          </a:blip>
+          <a:srcRect/>
+          <a:stretch>
+            <a:fillRect/>
+          </a:stretch>
+        </p:blipFill>
+        <p:spPr bwMode="auto">
+          <a:xfrm>
+            <a:off x="5770880" y="2791373"/>
+            <a:ext cx="2381250" cy="1590675"/>
+          </a:xfrm>
+          <a:prstGeom prst="rect">
+            <a:avLst/>
+          </a:prstGeom>
+          <a:noFill/>
+          <a:ln>
+            <a:solidFill>
+              <a:schemeClr val="tx1"/>
+            </a:solidFill>
+          </a:ln>
+          <a:extLst>
+            <a:ext uri="{909E8E84-426E-40DD-AFC4-6F175D3DCCD1}">
+              <a14:hiddenFill xmlns:a14="http://schemas.microsoft.com/office/drawing/2010/main">
+                <a:solidFill>
+                  <a:srgbClr val="FFFFFF"/>
+                </a:solidFill>
+              </a14:hiddenFill>
+            </a:ext>
+          </a:extLst>
+        </p:spPr>
+      </p:pic>
+    </p:spTree>
+    <p:extLst>
+      <p:ext uri="{BB962C8B-B14F-4D97-AF65-F5344CB8AC3E}">
+        <p14:creationId xmlns:p14="http://schemas.microsoft.com/office/powerpoint/2010/main" val="71591331"/>
+      </p:ext>
+    </p:extLst>
+  </p:cSld>
+  <p:clrMapOvr>
+    <a:masterClrMapping/>
+  </p:clrMapOvr>
+  <p:transition spd="med"/>
+</p:sld>
+</file>
+
+<file path=ppt/slides/slide13.xml><?xml version="1.0" encoding="utf-8"?>
+<p:sld xmlns:a="http://schemas.openxmlformats.org/drawingml/2006/main" xmlns:r="http://schemas.openxmlformats.org/officeDocument/2006/relationships" xmlns:p="http://schemas.openxmlformats.org/presentationml/2006/main">
+  <p:cSld>
+    <p:spTree>
+      <p:nvGrpSpPr>
+        <p:cNvPr id="1" name=""/>
+        <p:cNvGrpSpPr/>
+        <p:nvPr/>
+      </p:nvGrpSpPr>
+      <p:grpSpPr>
+        <a:xfrm>
+          <a:off x="0" y="0"/>
+          <a:ext cx="0" cy="0"/>
+          <a:chOff x="0" y="0"/>
+          <a:chExt cx="0" cy="0"/>
+        </a:xfrm>
+      </p:grpSpPr>
+      <p:sp>
+        <p:nvSpPr>
+          <p:cNvPr id="2" name="Slide Number Placeholder 1">
+            <a:extLst>
+              <a:ext uri="{FF2B5EF4-FFF2-40B4-BE49-F238E27FC236}">
+                <a16:creationId xmlns:a16="http://schemas.microsoft.com/office/drawing/2014/main" id="{49DF9779-357D-E5C4-0DBC-3EE4DB66D4FC}"/>
+              </a:ext>
+            </a:extLst>
+          </p:cNvPr>
+          <p:cNvSpPr>
+            <a:spLocks noGrp="1"/>
+          </p:cNvSpPr>
+          <p:nvPr>
+            <p:ph type="sldNum" sz="quarter" idx="2"/>
+          </p:nvPr>
+        </p:nvSpPr>
+        <p:spPr/>
+        <p:txBody>
+          <a:bodyPr/>
+          <a:lstStyle/>
+          <a:p>
+            <a:fld id="{86CB4B4D-7CA3-9044-876B-883B54F8677D}" type="slidenum">
+              <a:rPr lang="en-AU" smtClean="0"/>
+              <a:t>13</a:t>
+            </a:fld>
+            <a:endParaRPr lang="en-AU"/>
+          </a:p>
+        </p:txBody>
+      </p:sp>
+      <p:grpSp>
+        <p:nvGrpSpPr>
+          <p:cNvPr id="3" name="Title">
+            <a:extLst>
+              <a:ext uri="{FF2B5EF4-FFF2-40B4-BE49-F238E27FC236}">
+                <a16:creationId xmlns:a16="http://schemas.microsoft.com/office/drawing/2014/main" id="{558E4A6D-D457-0060-224C-65FA262877D5}"/>
+              </a:ext>
+            </a:extLst>
+          </p:cNvPr>
+          <p:cNvGrpSpPr/>
+          <p:nvPr/>
+        </p:nvGrpSpPr>
+        <p:grpSpPr>
+          <a:xfrm>
+            <a:off x="457200" y="238506"/>
+            <a:ext cx="8229600" cy="584773"/>
+            <a:chOff x="0" y="-23431"/>
+            <a:chExt cx="8229600" cy="584771"/>
+          </a:xfrm>
+        </p:grpSpPr>
+        <p:sp>
+          <p:nvSpPr>
+            <p:cNvPr id="4" name="Rectangle">
+              <a:extLst>
+                <a:ext uri="{FF2B5EF4-FFF2-40B4-BE49-F238E27FC236}">
+                  <a16:creationId xmlns:a16="http://schemas.microsoft.com/office/drawing/2014/main" id="{CC82A3DF-30EF-F084-6817-1650A5300C92}"/>
+                </a:ext>
+              </a:extLst>
+            </p:cNvPr>
+            <p:cNvSpPr/>
+            <p:nvPr/>
+          </p:nvSpPr>
+          <p:spPr>
+            <a:xfrm>
+              <a:off x="0" y="12699"/>
+              <a:ext cx="8229600" cy="548641"/>
+            </a:xfrm>
+            <a:prstGeom prst="rect">
+              <a:avLst/>
+            </a:prstGeom>
+            <a:noFill/>
+            <a:ln w="12700" cap="flat">
+              <a:solidFill>
+                <a:srgbClr val="FFFFFF"/>
+              </a:solidFill>
+              <a:prstDash val="solid"/>
+              <a:round/>
+            </a:ln>
+            <a:effectLst/>
+          </p:spPr>
+          <p:txBody>
+            <a:bodyPr wrap="square" lIns="45719" tIns="45719" rIns="45719" bIns="45719" numCol="1" anchor="ctr">
+              <a:noAutofit/>
+            </a:bodyPr>
+            <a:lstStyle/>
+            <a:p>
+              <a:endParaRPr/>
+            </a:p>
+          </p:txBody>
+        </p:sp>
+        <p:sp>
+          <p:nvSpPr>
+            <p:cNvPr id="5" name="Сервис Telegram-бота">
+              <a:extLst>
+                <a:ext uri="{FF2B5EF4-FFF2-40B4-BE49-F238E27FC236}">
+                  <a16:creationId xmlns:a16="http://schemas.microsoft.com/office/drawing/2014/main" id="{841CC381-0A99-4353-7CB5-2C3C8025E739}"/>
+                </a:ext>
+              </a:extLst>
+            </p:cNvPr>
+            <p:cNvSpPr txBox="1"/>
+            <p:nvPr/>
+          </p:nvSpPr>
+          <p:spPr>
+            <a:xfrm>
+              <a:off x="52069" y="-23431"/>
+              <a:ext cx="8125461" cy="584771"/>
+            </a:xfrm>
+            <a:prstGeom prst="rect">
+              <a:avLst/>
+            </a:prstGeom>
+            <a:noFill/>
+            <a:ln w="12700" cap="flat">
+              <a:noFill/>
+              <a:miter lim="400000"/>
+            </a:ln>
+            <a:effectLst/>
+            <a:extLst>
+              <a:ext uri="{C572A759-6A51-4108-AA02-DFA0A04FC94B}">
+                <ma14:wrappingTextBoxFlag xmlns:ma14="http://schemas.microsoft.com/office/mac/drawingml/2011/main" xmlns:a14="http://schemas.microsoft.com/office/drawing/2010/main" xmlns:m="http://schemas.openxmlformats.org/officeDocument/2006/math" xmlns="" val="1"/>
+              </a:ext>
+            </a:extLst>
+          </p:spPr>
+          <p:txBody>
+            <a:bodyPr wrap="square" lIns="45719" tIns="45719" rIns="45719" bIns="45719" numCol="1" anchor="ctr">
+              <a:spAutoFit/>
+            </a:bodyPr>
+            <a:lstStyle>
+              <a:lvl1pPr>
+                <a:defRPr sz="3200" b="1"/>
+              </a:lvl1pPr>
+            </a:lstStyle>
+            <a:p>
+              <a:pPr marL="0" marR="0" indent="0" algn="l" defTabSz="914400" rtl="0" fontAlgn="auto" latinLnBrk="0" hangingPunct="0">
+                <a:lnSpc>
+                  <a:spcPct val="100000"/>
+                </a:lnSpc>
+                <a:spcBef>
+                  <a:spcPts val="0"/>
+                </a:spcBef>
+                <a:spcAft>
+                  <a:spcPts val="0"/>
+                </a:spcAft>
+                <a:buClrTx/>
+                <a:buSzTx/>
+                <a:buFontTx/>
+                <a:buNone/>
+                <a:tabLst/>
+              </a:pPr>
+              <a:r>
+                <a:rPr lang="ru-RU" dirty="0"/>
+                <a:t>Хранилище файлов</a:t>
+              </a:r>
+              <a:endParaRPr kumimoji="0" lang="en-AU" sz="3200" i="0" u="none" strike="noStrike" cap="none" spc="0" normalizeH="0" baseline="0" dirty="0">
+                <a:ln>
+                  <a:noFill/>
+                </a:ln>
+                <a:solidFill>
+                  <a:srgbClr val="000000"/>
+                </a:solidFill>
+                <a:effectLst/>
+                <a:uFillTx/>
+                <a:latin typeface="+mn-lt"/>
+                <a:ea typeface="+mn-ea"/>
+                <a:cs typeface="+mn-cs"/>
+                <a:sym typeface="Aptos"/>
+              </a:endParaRPr>
+            </a:p>
+          </p:txBody>
+        </p:sp>
+      </p:grpSp>
+      <p:sp>
+        <p:nvSpPr>
+          <p:cNvPr id="6" name="Right">
+            <a:extLst>
+              <a:ext uri="{FF2B5EF4-FFF2-40B4-BE49-F238E27FC236}">
+                <a16:creationId xmlns:a16="http://schemas.microsoft.com/office/drawing/2014/main" id="{7D1227D9-3C16-3AA8-A49D-1BB9AD4D9547}"/>
+              </a:ext>
+            </a:extLst>
+          </p:cNvPr>
+          <p:cNvSpPr txBox="1"/>
+          <p:nvPr/>
+        </p:nvSpPr>
+        <p:spPr>
+          <a:xfrm>
+            <a:off x="509269" y="2255314"/>
+            <a:ext cx="6145531" cy="2347372"/>
+          </a:xfrm>
+          <a:prstGeom prst="rect">
+            <a:avLst/>
+          </a:prstGeom>
+          <a:ln w="12700">
+            <a:miter lim="400000"/>
+          </a:ln>
+          <a:extLst>
+            <a:ext uri="{C572A759-6A51-4108-AA02-DFA0A04FC94B}">
+              <ma14:wrappingTextBoxFlag xmlns:ma14="http://schemas.microsoft.com/office/mac/drawingml/2011/main" xmlns:a14="http://schemas.microsoft.com/office/drawing/2010/main" xmlns:m="http://schemas.openxmlformats.org/officeDocument/2006/math" xmlns="" val="1"/>
+            </a:ext>
+          </a:extLst>
+        </p:spPr>
+        <p:txBody>
+          <a:bodyPr wrap="square" tIns="91439" bIns="91439">
+            <a:spAutoFit/>
+          </a:bodyPr>
+          <a:lstStyle/>
+          <a:p>
+            <a:pPr marL="342900" indent="-342900">
+              <a:lnSpc>
+                <a:spcPct val="150000"/>
+              </a:lnSpc>
+              <a:buSzPct val="100000"/>
+              <a:buFont typeface="Arial" panose="020B0604020202020204" pitchFamily="34" charset="0"/>
+              <a:buChar char="•"/>
+              <a:defRPr sz="2400"/>
+            </a:pPr>
+            <a:r>
+              <a:rPr lang="ru-RU" dirty="0"/>
+              <a:t>В системе можно хранить документы</a:t>
+            </a:r>
+          </a:p>
+          <a:p>
+            <a:pPr marL="342900" indent="-342900">
+              <a:lnSpc>
+                <a:spcPct val="150000"/>
+              </a:lnSpc>
+              <a:buSzPct val="100000"/>
+              <a:buFont typeface="Arial" panose="020B0604020202020204" pitchFamily="34" charset="0"/>
+              <a:buChar char="•"/>
+              <a:defRPr sz="2400"/>
+            </a:pPr>
+            <a:r>
+              <a:rPr lang="ru-RU" dirty="0"/>
+              <a:t>Дедупликация</a:t>
+            </a:r>
+          </a:p>
+          <a:p>
+            <a:pPr marL="342900" indent="-342900">
+              <a:lnSpc>
+                <a:spcPct val="150000"/>
+              </a:lnSpc>
+              <a:buSzPct val="100000"/>
+              <a:buFont typeface="Arial" panose="020B0604020202020204" pitchFamily="34" charset="0"/>
+              <a:buChar char="•"/>
+              <a:defRPr sz="2400"/>
+            </a:pPr>
+            <a:r>
+              <a:rPr lang="ru-RU" dirty="0"/>
+              <a:t>Каждый сервис имеет доступ к файлам</a:t>
+            </a:r>
+          </a:p>
+          <a:p>
+            <a:pPr marL="342900" indent="-342900">
+              <a:lnSpc>
+                <a:spcPct val="150000"/>
+              </a:lnSpc>
+              <a:buSzPct val="100000"/>
+              <a:buFont typeface="Arial" panose="020B0604020202020204" pitchFamily="34" charset="0"/>
+              <a:buChar char="•"/>
+              <a:defRPr sz="2400"/>
+            </a:pPr>
+            <a:endParaRPr lang="ru-RU" dirty="0"/>
+          </a:p>
+        </p:txBody>
+      </p:sp>
+      <p:pic>
+        <p:nvPicPr>
+          <p:cNvPr id="2050" name="Picture 2" descr="Облачное хранилище – Бесплатные иконки: файлы и папки">
+            <a:extLst>
+              <a:ext uri="{FF2B5EF4-FFF2-40B4-BE49-F238E27FC236}">
+                <a16:creationId xmlns:a16="http://schemas.microsoft.com/office/drawing/2014/main" id="{BCE87238-D18F-65B5-2712-5CC11766FAB9}"/>
+              </a:ext>
+            </a:extLst>
+          </p:cNvPr>
+          <p:cNvPicPr>
+            <a:picLocks noChangeAspect="1" noChangeArrowheads="1"/>
+          </p:cNvPicPr>
+          <p:nvPr/>
+        </p:nvPicPr>
+        <p:blipFill>
+          <a:blip r:embed="rId2">
+            <a:extLst>
+              <a:ext uri="{28A0092B-C50C-407E-A947-70E740481C1C}">
+                <a14:useLocalDpi xmlns:a14="http://schemas.microsoft.com/office/drawing/2010/main" val="0"/>
+              </a:ext>
+            </a:extLst>
+          </a:blip>
+          <a:srcRect/>
+          <a:stretch>
+            <a:fillRect/>
+          </a:stretch>
+        </p:blipFill>
+        <p:spPr bwMode="auto">
+          <a:xfrm>
+            <a:off x="7958758" y="2070706"/>
+            <a:ext cx="2893392" cy="2893392"/>
+          </a:xfrm>
+          <a:prstGeom prst="rect">
+            <a:avLst/>
+          </a:prstGeom>
+          <a:noFill/>
+          <a:extLst>
+            <a:ext uri="{909E8E84-426E-40DD-AFC4-6F175D3DCCD1}">
+              <a14:hiddenFill xmlns:a14="http://schemas.microsoft.com/office/drawing/2010/main">
+                <a:solidFill>
+                  <a:srgbClr val="FFFFFF"/>
+                </a:solidFill>
+              </a14:hiddenFill>
+            </a:ext>
+          </a:extLst>
+        </p:spPr>
+      </p:pic>
+    </p:spTree>
+    <p:extLst>
+      <p:ext uri="{BB962C8B-B14F-4D97-AF65-F5344CB8AC3E}">
+        <p14:creationId xmlns:p14="http://schemas.microsoft.com/office/powerpoint/2010/main" val="2421779884"/>
+      </p:ext>
+    </p:extLst>
+  </p:cSld>
+  <p:clrMapOvr>
+    <a:masterClrMapping/>
+  </p:clrMapOvr>
+  <p:transition spd="med"/>
+</p:sld>
+</file>
+
+<file path=ppt/slides/slide14.xml><?xml version="1.0" encoding="utf-8"?>
 <p:sld xmlns:a="http://schemas.openxmlformats.org/drawingml/2006/main" xmlns:r="http://schemas.openxmlformats.org/officeDocument/2006/relationships" xmlns:p="http://schemas.openxmlformats.org/presentationml/2006/main">
   <p:cSld>
     <p:spTree>
@@ -4845,7 +6348,7 @@
             <a:effectLst/>
             <a:extLst>
               <a:ext uri="{C572A759-6A51-4108-AA02-DFA0A04FC94B}">
-                <ma14:wrappingTextBoxFlag xmlns="" xmlns:m="http://schemas.openxmlformats.org/officeDocument/2006/math" xmlns:a14="http://schemas.microsoft.com/office/drawing/2010/main" xmlns:ma14="http://schemas.microsoft.com/office/mac/drawingml/2011/main" val="1"/>
+                <ma14:wrappingTextBoxFlag xmlns:ma14="http://schemas.microsoft.com/office/mac/drawingml/2011/main" xmlns:a14="http://schemas.microsoft.com/office/drawing/2010/main" xmlns:m="http://schemas.openxmlformats.org/officeDocument/2006/math" xmlns="" val="1"/>
               </a:ext>
             </a:extLst>
           </p:spPr>
@@ -4920,6 +6423,35 @@
           </a:ln>
         </p:spPr>
       </p:pic>
+      <p:sp>
+        <p:nvSpPr>
+          <p:cNvPr id="2" name="Slide Number Placeholder 1">
+            <a:extLst>
+              <a:ext uri="{FF2B5EF4-FFF2-40B4-BE49-F238E27FC236}">
+                <a16:creationId xmlns:a16="http://schemas.microsoft.com/office/drawing/2014/main" id="{4F8CCA99-F9C5-05CF-921A-F8DE03881F33}"/>
+              </a:ext>
+            </a:extLst>
+          </p:cNvPr>
+          <p:cNvSpPr>
+            <a:spLocks noGrp="1"/>
+          </p:cNvSpPr>
+          <p:nvPr>
+            <p:ph type="sldNum" sz="quarter" idx="2"/>
+          </p:nvPr>
+        </p:nvSpPr>
+        <p:spPr/>
+        <p:txBody>
+          <a:bodyPr/>
+          <a:lstStyle/>
+          <a:p>
+            <a:fld id="{86CB4B4D-7CA3-9044-876B-883B54F8677D}" type="slidenum">
+              <a:rPr lang="en-AU" smtClean="0"/>
+              <a:t>14</a:t>
+            </a:fld>
+            <a:endParaRPr lang="en-AU"/>
+          </a:p>
+        </p:txBody>
+      </p:sp>
     </p:spTree>
   </p:cSld>
   <p:clrMapOvr>
@@ -4929,7 +6461,7 @@
 </p:sld>
 </file>
 
-<file path=ppt/slides/slide12.xml><?xml version="1.0" encoding="utf-8"?>
+<file path=ppt/slides/slide15.xml><?xml version="1.0" encoding="utf-8"?>
 <p:sld xmlns:a="http://schemas.openxmlformats.org/drawingml/2006/main" xmlns:r="http://schemas.openxmlformats.org/officeDocument/2006/relationships" xmlns:p="http://schemas.openxmlformats.org/presentationml/2006/main">
   <p:cSld>
     <p:spTree>
@@ -4954,10 +6486,10 @@
         </p:nvGrpSpPr>
         <p:grpSpPr>
           <a:xfrm>
-            <a:off x="457200" y="274638"/>
-            <a:ext cx="8229600" cy="548641"/>
-            <a:chOff x="0" y="0"/>
-            <a:chExt cx="8229600" cy="548640"/>
+            <a:off x="457200" y="256572"/>
+            <a:ext cx="8229600" cy="584773"/>
+            <a:chOff x="0" y="-18066"/>
+            <a:chExt cx="8229600" cy="584772"/>
           </a:xfrm>
         </p:grpSpPr>
         <p:sp>
@@ -5002,8 +6534,8 @@
           </p:nvSpPr>
           <p:spPr>
             <a:xfrm>
-              <a:off x="52069" y="44449"/>
-              <a:ext cx="8125461" cy="459741"/>
+              <a:off x="52069" y="-18066"/>
+              <a:ext cx="8125461" cy="584772"/>
             </a:xfrm>
             <a:prstGeom prst="rect">
               <a:avLst/>
@@ -5016,7 +6548,7 @@
             <a:effectLst/>
             <a:extLst>
               <a:ext uri="{C572A759-6A51-4108-AA02-DFA0A04FC94B}">
-                <ma14:wrappingTextBoxFlag xmlns="" xmlns:m="http://schemas.openxmlformats.org/officeDocument/2006/math" xmlns:a14="http://schemas.microsoft.com/office/drawing/2010/main" xmlns:ma14="http://schemas.microsoft.com/office/mac/drawingml/2011/main" val="1"/>
+                <ma14:wrappingTextBoxFlag xmlns:ma14="http://schemas.microsoft.com/office/mac/drawingml/2011/main" xmlns:a14="http://schemas.microsoft.com/office/drawing/2010/main" xmlns:m="http://schemas.openxmlformats.org/officeDocument/2006/math" xmlns="" val="1"/>
               </a:ext>
             </a:extLst>
           </p:spPr>
@@ -5031,15 +6563,60 @@
             </a:lstStyle>
             <a:p>
               <a:r>
-                <a:t>Административная панель</a:t>
+                <a:rPr sz="3200" dirty="0" err="1"/>
+                <a:t>Административная</a:t>
               </a:r>
+              <a:r>
+                <a:rPr sz="3200" dirty="0"/>
+                <a:t> </a:t>
+              </a:r>
+              <a:r>
+                <a:rPr sz="3200" dirty="0" err="1"/>
+                <a:t>панель</a:t>
+              </a:r>
+              <a:endParaRPr sz="3200" dirty="0"/>
             </a:p>
           </p:txBody>
         </p:sp>
       </p:grpSp>
+      <p:sp>
+        <p:nvSpPr>
+          <p:cNvPr id="2" name="Slide Number Placeholder 1">
+            <a:extLst>
+              <a:ext uri="{FF2B5EF4-FFF2-40B4-BE49-F238E27FC236}">
+                <a16:creationId xmlns:a16="http://schemas.microsoft.com/office/drawing/2014/main" id="{1691BD92-3E40-88C3-44DD-C3A3EB822C91}"/>
+              </a:ext>
+            </a:extLst>
+          </p:cNvPr>
+          <p:cNvSpPr>
+            <a:spLocks noGrp="1"/>
+          </p:cNvSpPr>
+          <p:nvPr>
+            <p:ph type="sldNum" sz="quarter" idx="2"/>
+          </p:nvPr>
+        </p:nvSpPr>
+        <p:spPr/>
+        <p:txBody>
+          <a:bodyPr/>
+          <a:lstStyle/>
+          <a:p>
+            <a:fld id="{86CB4B4D-7CA3-9044-876B-883B54F8677D}" type="slidenum">
+              <a:rPr lang="en-AU" smtClean="0"/>
+              <a:t>15</a:t>
+            </a:fld>
+            <a:endParaRPr lang="en-AU"/>
+          </a:p>
+        </p:txBody>
+      </p:sp>
       <p:pic>
         <p:nvPicPr>
-          <p:cNvPr id="234" name="Picture 7" descr="Picture 7"/>
+          <p:cNvPr id="5" name="Picture 4">
+            <a:extLst>
+              <a:ext uri="{FF2B5EF4-FFF2-40B4-BE49-F238E27FC236}">
+                <a16:creationId xmlns:a16="http://schemas.microsoft.com/office/drawing/2014/main" id="{12261665-E199-11BC-0D08-F60CF0298ADB}"/>
+              </a:ext>
+            </a:extLst>
+          </p:cNvPr>
           <p:cNvPicPr>
             <a:picLocks noChangeAspect="1"/>
           </p:cNvPicPr>
@@ -5047,26 +6624,28 @@
         </p:nvPicPr>
         <p:blipFill>
           <a:blip r:embed="rId2"/>
-          <a:stretch>
-            <a:fillRect/>
-          </a:stretch>
+          <a:srcRect r="1172"/>
+          <a:stretch/>
         </p:blipFill>
         <p:spPr>
           <a:xfrm>
-            <a:off x="194982" y="1109381"/>
-            <a:ext cx="5649201" cy="4912931"/>
+            <a:off x="277217" y="1326012"/>
+            <a:ext cx="5706576" cy="4402419"/>
           </a:xfrm>
           <a:prstGeom prst="rect">
             <a:avLst/>
           </a:prstGeom>
-          <a:ln w="12700">
-            <a:miter lim="400000"/>
-          </a:ln>
         </p:spPr>
       </p:pic>
       <p:pic>
         <p:nvPicPr>
-          <p:cNvPr id="235" name="Picture 9" descr="Picture 9"/>
+          <p:cNvPr id="6" name="Picture 5">
+            <a:extLst>
+              <a:ext uri="{FF2B5EF4-FFF2-40B4-BE49-F238E27FC236}">
+                <a16:creationId xmlns:a16="http://schemas.microsoft.com/office/drawing/2014/main" id="{FD01953D-3F3F-5E15-F40B-BF2CDF604658}"/>
+              </a:ext>
+            </a:extLst>
+          </p:cNvPr>
           <p:cNvPicPr>
             <a:picLocks noChangeAspect="1"/>
           </p:cNvPicPr>
@@ -5074,21 +6653,17 @@
         </p:nvPicPr>
         <p:blipFill>
           <a:blip r:embed="rId3"/>
-          <a:stretch>
-            <a:fillRect/>
-          </a:stretch>
+          <a:srcRect r="1151"/>
+          <a:stretch/>
         </p:blipFill>
         <p:spPr>
           <a:xfrm>
-            <a:off x="6106400" y="1109381"/>
-            <a:ext cx="5947993" cy="4924583"/>
+            <a:off x="6208209" y="1326012"/>
+            <a:ext cx="5706576" cy="4453736"/>
           </a:xfrm>
           <a:prstGeom prst="rect">
             <a:avLst/>
           </a:prstGeom>
-          <a:ln w="12700">
-            <a:miter lim="400000"/>
-          </a:ln>
         </p:spPr>
       </p:pic>
     </p:spTree>
@@ -5100,7 +6675,7 @@
 </p:sld>
 </file>
 
-<file path=ppt/slides/slide13.xml><?xml version="1.0" encoding="utf-8"?>
+<file path=ppt/slides/slide16.xml><?xml version="1.0" encoding="utf-8"?>
 <p:sld xmlns:a="http://schemas.openxmlformats.org/drawingml/2006/main" xmlns:r="http://schemas.openxmlformats.org/officeDocument/2006/relationships" xmlns:p="http://schemas.openxmlformats.org/presentationml/2006/main">
   <p:cSld>
     <p:spTree>
@@ -5187,7 +6762,7 @@
             <a:effectLst/>
             <a:extLst>
               <a:ext uri="{C572A759-6A51-4108-AA02-DFA0A04FC94B}">
-                <ma14:wrappingTextBoxFlag xmlns="" xmlns:m="http://schemas.openxmlformats.org/officeDocument/2006/math" xmlns:a14="http://schemas.microsoft.com/office/drawing/2010/main" xmlns:ma14="http://schemas.microsoft.com/office/mac/drawingml/2011/main" val="1"/>
+                <ma14:wrappingTextBoxFlag xmlns:ma14="http://schemas.microsoft.com/office/mac/drawingml/2011/main" xmlns:a14="http://schemas.microsoft.com/office/drawing/2010/main" xmlns:m="http://schemas.openxmlformats.org/officeDocument/2006/math" xmlns="" val="1"/>
               </a:ext>
             </a:extLst>
           </p:spPr>
@@ -5222,8 +6797,8 @@
         </p:nvSpPr>
         <p:spPr>
           <a:xfrm>
-            <a:off x="457200" y="1028345"/>
-            <a:ext cx="5492427" cy="2400655"/>
+            <a:off x="457200" y="2306420"/>
+            <a:ext cx="10922000" cy="2154434"/>
           </a:xfrm>
           <a:prstGeom prst="rect">
             <a:avLst/>
@@ -5233,7 +6808,7 @@
           </a:ln>
           <a:extLst>
             <a:ext uri="{C572A759-6A51-4108-AA02-DFA0A04FC94B}">
-              <ma14:wrappingTextBoxFlag xmlns="" xmlns:m="http://schemas.openxmlformats.org/officeDocument/2006/math" xmlns:a14="http://schemas.microsoft.com/office/drawing/2010/main" xmlns:ma14="http://schemas.microsoft.com/office/mac/drawingml/2011/main" val="1"/>
+              <ma14:wrappingTextBoxFlag xmlns:ma14="http://schemas.microsoft.com/office/mac/drawingml/2011/main" xmlns:a14="http://schemas.microsoft.com/office/drawing/2010/main" xmlns:m="http://schemas.openxmlformats.org/officeDocument/2006/math" xmlns="" val="1"/>
             </a:ext>
           </a:extLst>
         </p:spPr>
@@ -5247,130 +6822,130 @@
             </a:lvl1pPr>
           </a:lstStyle>
           <a:p>
-            <a:pPr marL="342900" indent="-342900">
+            <a:pPr marL="342900" indent="-342900" algn="just">
               <a:buFont typeface="Arial" panose="020B0604020202020204" pitchFamily="34" charset="0"/>
               <a:buChar char="•"/>
             </a:pPr>
             <a:r>
-              <a:rPr lang="ru-RU" dirty="0"/>
+              <a:rPr lang="ru-RU" sz="3200" dirty="0"/>
               <a:t>Была р</a:t>
             </a:r>
             <a:r>
-              <a:rPr dirty="0" err="1"/>
+              <a:rPr sz="3200" dirty="0" err="1"/>
               <a:t>азработа</a:t>
             </a:r>
             <a:r>
-              <a:rPr lang="ru-RU" dirty="0"/>
+              <a:rPr lang="ru-RU" sz="3200" dirty="0"/>
               <a:t>на</a:t>
             </a:r>
             <a:r>
-              <a:rPr dirty="0"/>
+              <a:rPr sz="3200" dirty="0"/>
               <a:t> </a:t>
             </a:r>
             <a:r>
-              <a:rPr dirty="0" err="1"/>
+              <a:rPr sz="3200" dirty="0" err="1"/>
               <a:t>многоязычн</a:t>
             </a:r>
             <a:r>
-              <a:rPr lang="ru-RU" dirty="0"/>
+              <a:rPr lang="ru-RU" sz="3200" dirty="0"/>
               <a:t>ая</a:t>
             </a:r>
             <a:r>
-              <a:rPr dirty="0"/>
+              <a:rPr sz="3200" dirty="0"/>
               <a:t> </a:t>
             </a:r>
             <a:r>
-              <a:rPr dirty="0" err="1"/>
+              <a:rPr sz="3200" dirty="0" err="1"/>
               <a:t>систем</a:t>
             </a:r>
             <a:r>
-              <a:rPr lang="ru-RU" dirty="0"/>
+              <a:rPr lang="ru-RU" sz="3200" dirty="0"/>
               <a:t>а</a:t>
             </a:r>
             <a:r>
-              <a:rPr dirty="0"/>
+              <a:rPr sz="3200" dirty="0"/>
               <a:t> </a:t>
             </a:r>
             <a:r>
-              <a:rPr dirty="0" err="1"/>
+              <a:rPr sz="3200" dirty="0" err="1"/>
               <a:t>поддержки</a:t>
             </a:r>
             <a:r>
-              <a:rPr dirty="0"/>
+              <a:rPr sz="3200" dirty="0"/>
               <a:t> </a:t>
             </a:r>
             <a:r>
-              <a:rPr dirty="0" err="1"/>
+              <a:rPr sz="3200" dirty="0" err="1"/>
               <a:t>иностранных</a:t>
             </a:r>
             <a:r>
-              <a:rPr dirty="0"/>
+              <a:rPr sz="3200" dirty="0"/>
               <a:t> </a:t>
             </a:r>
             <a:r>
-              <a:rPr dirty="0" err="1"/>
+              <a:rPr sz="3200" dirty="0" err="1"/>
               <a:t>студентов</a:t>
             </a:r>
             <a:r>
-              <a:rPr lang="ru-RU" dirty="0"/>
+              <a:rPr lang="ru-RU" sz="3200" dirty="0"/>
               <a:t>.</a:t>
             </a:r>
             <a:r>
-              <a:rPr dirty="0"/>
+              <a:rPr sz="3200" dirty="0"/>
               <a:t> </a:t>
             </a:r>
-            <a:endParaRPr lang="ru-RU" dirty="0"/>
-          </a:p>
-          <a:p>
-            <a:pPr marL="342900" indent="-342900">
+            <a:endParaRPr lang="ru-RU" sz="3200" dirty="0"/>
+          </a:p>
+          <a:p>
+            <a:pPr marL="342900" indent="-342900" algn="just">
               <a:buFont typeface="Arial" panose="020B0604020202020204" pitchFamily="34" charset="0"/>
               <a:buChar char="•"/>
             </a:pPr>
             <a:r>
-              <a:rPr lang="ru-RU" dirty="0"/>
+              <a:rPr lang="ru-RU" sz="3200" dirty="0"/>
               <a:t>Были созданы</a:t>
             </a:r>
             <a:r>
-              <a:rPr dirty="0"/>
+              <a:rPr sz="3200" dirty="0"/>
               <a:t> Telegram-</a:t>
             </a:r>
             <a:r>
-              <a:rPr dirty="0" err="1"/>
+              <a:rPr sz="3200" dirty="0" err="1"/>
               <a:t>бот</a:t>
             </a:r>
             <a:r>
-              <a:rPr dirty="0"/>
+              <a:rPr sz="3200" dirty="0"/>
               <a:t>, </a:t>
             </a:r>
             <a:r>
-              <a:rPr dirty="0" err="1"/>
+              <a:rPr sz="3200" dirty="0" err="1"/>
               <a:t>веб-приложение</a:t>
             </a:r>
             <a:r>
-              <a:rPr dirty="0"/>
+              <a:rPr sz="3200" dirty="0"/>
               <a:t> и </a:t>
             </a:r>
             <a:r>
-              <a:rPr dirty="0" err="1"/>
+              <a:rPr sz="3200" dirty="0" err="1"/>
               <a:t>административн</a:t>
             </a:r>
             <a:r>
-              <a:rPr lang="ru-RU" dirty="0"/>
+              <a:rPr lang="ru-RU" sz="3200" dirty="0"/>
               <a:t>ая</a:t>
             </a:r>
             <a:r>
-              <a:rPr dirty="0"/>
+              <a:rPr sz="3200" dirty="0"/>
               <a:t> </a:t>
             </a:r>
             <a:r>
-              <a:rPr dirty="0" err="1"/>
+              <a:rPr sz="3200" dirty="0" err="1"/>
               <a:t>панель</a:t>
             </a:r>
             <a:r>
-              <a:rPr lang="ru-RU" dirty="0"/>
+              <a:rPr lang="ru-RU" sz="3200" dirty="0"/>
               <a:t>.</a:t>
             </a:r>
-            <a:endParaRPr dirty="0"/>
+            <a:endParaRPr sz="3200" dirty="0"/>
           </a:p>
         </p:txBody>
       </p:sp>
@@ -5475,7 +7050,7 @@
             <a:effectLst/>
             <a:extLst>
               <a:ext uri="{C572A759-6A51-4108-AA02-DFA0A04FC94B}">
-                <ma14:wrappingTextBoxFlag xmlns="" xmlns:m="http://schemas.openxmlformats.org/officeDocument/2006/math" xmlns:a14="http://schemas.microsoft.com/office/drawing/2010/main" xmlns:ma14="http://schemas.microsoft.com/office/mac/drawingml/2011/main" val="1"/>
+                <ma14:wrappingTextBoxFlag xmlns:ma14="http://schemas.microsoft.com/office/mac/drawingml/2011/main" xmlns:a14="http://schemas.microsoft.com/office/drawing/2010/main" xmlns:m="http://schemas.openxmlformats.org/officeDocument/2006/math" xmlns="" val="1"/>
               </a:ext>
             </a:extLst>
           </p:spPr>
@@ -5515,7 +7090,7 @@
           </a:ln>
           <a:extLst>
             <a:ext uri="{C572A759-6A51-4108-AA02-DFA0A04FC94B}">
-              <ma14:wrappingTextBoxFlag xmlns="" xmlns:m="http://schemas.openxmlformats.org/officeDocument/2006/math" xmlns:a14="http://schemas.microsoft.com/office/drawing/2010/main" xmlns:ma14="http://schemas.microsoft.com/office/mac/drawingml/2011/main" val="1"/>
+              <ma14:wrappingTextBoxFlag xmlns:ma14="http://schemas.microsoft.com/office/mac/drawingml/2011/main" xmlns:a14="http://schemas.microsoft.com/office/drawing/2010/main" xmlns:m="http://schemas.openxmlformats.org/officeDocument/2006/math" xmlns="" val="1"/>
             </a:ext>
           </a:extLst>
         </p:spPr>
@@ -5582,6 +7157,35 @@
           </a:ln>
         </p:spPr>
       </p:pic>
+      <p:sp>
+        <p:nvSpPr>
+          <p:cNvPr id="2" name="Slide Number Placeholder 1">
+            <a:extLst>
+              <a:ext uri="{FF2B5EF4-FFF2-40B4-BE49-F238E27FC236}">
+                <a16:creationId xmlns:a16="http://schemas.microsoft.com/office/drawing/2014/main" id="{AE2FF36E-7857-7A84-0E0D-AE708E6AEE41}"/>
+              </a:ext>
+            </a:extLst>
+          </p:cNvPr>
+          <p:cNvSpPr>
+            <a:spLocks noGrp="1"/>
+          </p:cNvSpPr>
+          <p:nvPr>
+            <p:ph type="sldNum" sz="quarter" idx="2"/>
+          </p:nvPr>
+        </p:nvSpPr>
+        <p:spPr/>
+        <p:txBody>
+          <a:bodyPr/>
+          <a:lstStyle/>
+          <a:p>
+            <a:fld id="{86CB4B4D-7CA3-9044-876B-883B54F8677D}" type="slidenum">
+              <a:rPr lang="en-AU" smtClean="0"/>
+              <a:t>2</a:t>
+            </a:fld>
+            <a:endParaRPr lang="en-AU"/>
+          </a:p>
+        </p:txBody>
+      </p:sp>
     </p:spTree>
   </p:cSld>
   <p:clrMapOvr>
@@ -5678,7 +7282,7 @@
             <a:effectLst/>
             <a:extLst>
               <a:ext uri="{C572A759-6A51-4108-AA02-DFA0A04FC94B}">
-                <ma14:wrappingTextBoxFlag xmlns="" xmlns:m="http://schemas.openxmlformats.org/officeDocument/2006/math" xmlns:a14="http://schemas.microsoft.com/office/drawing/2010/main" xmlns:ma14="http://schemas.microsoft.com/office/mac/drawingml/2011/main" val="1"/>
+                <ma14:wrappingTextBoxFlag xmlns:ma14="http://schemas.microsoft.com/office/mac/drawingml/2011/main" xmlns:a14="http://schemas.microsoft.com/office/drawing/2010/main" xmlns:m="http://schemas.openxmlformats.org/officeDocument/2006/math" xmlns="" val="1"/>
               </a:ext>
             </a:extLst>
           </p:spPr>
@@ -5707,8 +7311,8 @@
         </p:nvSpPr>
         <p:spPr>
           <a:xfrm>
-            <a:off x="813546" y="3018864"/>
-            <a:ext cx="10564908" cy="1287781"/>
+            <a:off x="813546" y="2598004"/>
+            <a:ext cx="10564908" cy="1661991"/>
           </a:xfrm>
           <a:prstGeom prst="rect">
             <a:avLst/>
@@ -5718,7 +7322,7 @@
           </a:ln>
           <a:extLst>
             <a:ext uri="{C572A759-6A51-4108-AA02-DFA0A04FC94B}">
-              <ma14:wrappingTextBoxFlag xmlns="" xmlns:m="http://schemas.openxmlformats.org/officeDocument/2006/math" xmlns:a14="http://schemas.microsoft.com/office/drawing/2010/main" xmlns:ma14="http://schemas.microsoft.com/office/mac/drawingml/2011/main" val="1"/>
+              <ma14:wrappingTextBoxFlag xmlns:ma14="http://schemas.microsoft.com/office/mac/drawingml/2011/main" xmlns:a14="http://schemas.microsoft.com/office/drawing/2010/main" xmlns:m="http://schemas.openxmlformats.org/officeDocument/2006/math" xmlns="" val="1"/>
             </a:ext>
           </a:extLst>
         </p:spPr>
@@ -5733,90 +7337,119 @@
           </a:lstStyle>
           <a:p>
             <a:r>
-              <a:rPr dirty="0" err="1"/>
+              <a:rPr sz="3200" dirty="0" err="1"/>
               <a:t>Разработать</a:t>
             </a:r>
             <a:r>
-              <a:rPr dirty="0"/>
+              <a:rPr sz="3200" dirty="0"/>
               <a:t> </a:t>
             </a:r>
             <a:r>
-              <a:rPr dirty="0" err="1"/>
+              <a:rPr sz="3200" dirty="0" err="1"/>
               <a:t>многоязычную</a:t>
             </a:r>
             <a:r>
-              <a:rPr dirty="0"/>
+              <a:rPr sz="3200" dirty="0"/>
               <a:t> </a:t>
             </a:r>
             <a:r>
-              <a:rPr dirty="0" err="1"/>
+              <a:rPr sz="3200" dirty="0" err="1"/>
               <a:t>систему</a:t>
             </a:r>
             <a:r>
-              <a:rPr dirty="0"/>
+              <a:rPr sz="3200" dirty="0"/>
               <a:t> </a:t>
             </a:r>
             <a:r>
-              <a:rPr dirty="0" err="1"/>
+              <a:rPr sz="3200" dirty="0" err="1"/>
               <a:t>поддержки</a:t>
             </a:r>
             <a:r>
-              <a:rPr dirty="0"/>
+              <a:rPr sz="3200" dirty="0"/>
               <a:t> </a:t>
             </a:r>
             <a:r>
-              <a:rPr dirty="0" err="1"/>
+              <a:rPr sz="3200" dirty="0" err="1"/>
               <a:t>иностранных</a:t>
             </a:r>
             <a:r>
-              <a:rPr dirty="0"/>
+              <a:rPr sz="3200" dirty="0"/>
               <a:t> </a:t>
             </a:r>
             <a:r>
-              <a:rPr dirty="0" err="1"/>
+              <a:rPr sz="3200" dirty="0" err="1"/>
               <a:t>студентов</a:t>
             </a:r>
             <a:r>
-              <a:rPr dirty="0"/>
+              <a:rPr sz="3200" dirty="0"/>
               <a:t>, </a:t>
             </a:r>
             <a:r>
-              <a:rPr dirty="0" err="1"/>
+              <a:rPr sz="3200" dirty="0" err="1"/>
               <a:t>включающую</a:t>
             </a:r>
             <a:r>
-              <a:rPr dirty="0"/>
+              <a:rPr sz="3200" dirty="0"/>
               <a:t> Telegram-</a:t>
             </a:r>
             <a:r>
-              <a:rPr dirty="0" err="1"/>
+              <a:rPr sz="3200" dirty="0" err="1"/>
               <a:t>бота</a:t>
             </a:r>
             <a:r>
-              <a:rPr dirty="0"/>
+              <a:rPr sz="3200" dirty="0"/>
               <a:t>, </a:t>
             </a:r>
             <a:r>
-              <a:rPr dirty="0" err="1"/>
+              <a:rPr sz="3200" dirty="0" err="1"/>
               <a:t>веб-приложение</a:t>
             </a:r>
             <a:r>
-              <a:rPr dirty="0"/>
+              <a:rPr sz="3200" dirty="0"/>
               <a:t> и </a:t>
             </a:r>
             <a:r>
-              <a:rPr dirty="0" err="1"/>
+              <a:rPr sz="3200" dirty="0" err="1"/>
               <a:t>административную</a:t>
             </a:r>
             <a:r>
-              <a:rPr dirty="0"/>
+              <a:rPr sz="3200" dirty="0"/>
               <a:t> </a:t>
             </a:r>
             <a:r>
-              <a:rPr dirty="0" err="1"/>
+              <a:rPr sz="3200" dirty="0" err="1"/>
               <a:t>панель</a:t>
             </a:r>
-            <a:endParaRPr dirty="0"/>
+            <a:endParaRPr sz="3200" dirty="0"/>
+          </a:p>
+        </p:txBody>
+      </p:sp>
+      <p:sp>
+        <p:nvSpPr>
+          <p:cNvPr id="2" name="Slide Number Placeholder 1">
+            <a:extLst>
+              <a:ext uri="{FF2B5EF4-FFF2-40B4-BE49-F238E27FC236}">
+                <a16:creationId xmlns:a16="http://schemas.microsoft.com/office/drawing/2014/main" id="{7FF89CD2-BAF5-6EB0-BCF5-1F0C2BDDD842}"/>
+              </a:ext>
+            </a:extLst>
+          </p:cNvPr>
+          <p:cNvSpPr>
+            <a:spLocks noGrp="1"/>
+          </p:cNvSpPr>
+          <p:nvPr>
+            <p:ph type="sldNum" sz="quarter" idx="2"/>
+          </p:nvPr>
+        </p:nvSpPr>
+        <p:spPr/>
+        <p:txBody>
+          <a:bodyPr/>
+          <a:lstStyle/>
+          <a:p>
+            <a:fld id="{86CB4B4D-7CA3-9044-876B-883B54F8677D}" type="slidenum">
+              <a:rPr lang="en-AU" smtClean="0"/>
+              <a:t>3</a:t>
+            </a:fld>
+            <a:endParaRPr lang="en-AU"/>
           </a:p>
         </p:txBody>
       </p:sp>
@@ -6003,12 +7636,41 @@
           </a:p>
         </p:txBody>
       </p:sp>
+      <p:sp>
+        <p:nvSpPr>
+          <p:cNvPr id="2" name="Slide Number Placeholder 1">
+            <a:extLst>
+              <a:ext uri="{FF2B5EF4-FFF2-40B4-BE49-F238E27FC236}">
+                <a16:creationId xmlns:a16="http://schemas.microsoft.com/office/drawing/2014/main" id="{6A19F70A-FFAD-6841-0001-7D92B01858A2}"/>
+              </a:ext>
+            </a:extLst>
+          </p:cNvPr>
+          <p:cNvSpPr>
+            <a:spLocks noGrp="1"/>
+          </p:cNvSpPr>
+          <p:nvPr>
+            <p:ph type="sldNum" sz="quarter" idx="2"/>
+          </p:nvPr>
+        </p:nvSpPr>
+        <p:spPr/>
+        <p:txBody>
+          <a:bodyPr/>
+          <a:lstStyle/>
+          <a:p>
+            <a:fld id="{86CB4B4D-7CA3-9044-876B-883B54F8677D}" type="slidenum">
+              <a:rPr lang="en-AU" smtClean="0"/>
+              <a:t>4</a:t>
+            </a:fld>
+            <a:endParaRPr lang="en-AU"/>
+          </a:p>
+        </p:txBody>
+      </p:sp>
       <p:pic>
         <p:nvPicPr>
-          <p:cNvPr id="3" name="Picture 2">
+          <p:cNvPr id="5" name="Picture 4">
             <a:extLst>
               <a:ext uri="{FF2B5EF4-FFF2-40B4-BE49-F238E27FC236}">
-                <a16:creationId xmlns:a16="http://schemas.microsoft.com/office/drawing/2014/main" id="{D074CA4B-038B-D9E5-F5E9-AFE8217E0A3A}"/>
+                <a16:creationId xmlns:a16="http://schemas.microsoft.com/office/drawing/2014/main" id="{A2BA8F3D-9A02-8126-AC22-BD8ABBB11CE3}"/>
               </a:ext>
             </a:extLst>
           </p:cNvPr>
@@ -6025,8 +7687,8 @@
         </p:blipFill>
         <p:spPr>
           <a:xfrm>
-            <a:off x="6215266" y="1075677"/>
-            <a:ext cx="5519534" cy="4920416"/>
+            <a:off x="5753100" y="1346609"/>
+            <a:ext cx="5873750" cy="4485774"/>
           </a:xfrm>
           <a:prstGeom prst="rect">
             <a:avLst/>
@@ -6134,7 +7796,7 @@
             <a:effectLst/>
             <a:extLst>
               <a:ext uri="{C572A759-6A51-4108-AA02-DFA0A04FC94B}">
-                <ma14:wrappingTextBoxFlag xmlns="" xmlns:m="http://schemas.openxmlformats.org/officeDocument/2006/math" xmlns:a14="http://schemas.microsoft.com/office/drawing/2010/main" xmlns:ma14="http://schemas.microsoft.com/office/mac/drawingml/2011/main" val="1"/>
+                <ma14:wrappingTextBoxFlag xmlns:ma14="http://schemas.microsoft.com/office/mac/drawingml/2011/main" xmlns:a14="http://schemas.microsoft.com/office/drawing/2010/main" xmlns:m="http://schemas.openxmlformats.org/officeDocument/2006/math" xmlns="" val="1"/>
               </a:ext>
             </a:extLst>
           </p:spPr>
@@ -6174,7 +7836,7 @@
           </a:ln>
           <a:extLst>
             <a:ext uri="{C572A759-6A51-4108-AA02-DFA0A04FC94B}">
-              <ma14:wrappingTextBoxFlag xmlns="" xmlns:m="http://schemas.openxmlformats.org/officeDocument/2006/math" xmlns:a14="http://schemas.microsoft.com/office/drawing/2010/main" xmlns:ma14="http://schemas.microsoft.com/office/mac/drawingml/2011/main" val="1"/>
+              <ma14:wrappingTextBoxFlag xmlns:ma14="http://schemas.microsoft.com/office/mac/drawingml/2011/main" xmlns:a14="http://schemas.microsoft.com/office/drawing/2010/main" xmlns:m="http://schemas.openxmlformats.org/officeDocument/2006/math" xmlns="" val="1"/>
             </a:ext>
           </a:extLst>
         </p:spPr>
@@ -6290,7 +7952,7 @@
           </a:ln>
           <a:extLst>
             <a:ext uri="{C572A759-6A51-4108-AA02-DFA0A04FC94B}">
-              <ma14:wrappingTextBoxFlag xmlns="" xmlns:m="http://schemas.openxmlformats.org/officeDocument/2006/math" xmlns:a14="http://schemas.microsoft.com/office/drawing/2010/main" xmlns:ma14="http://schemas.microsoft.com/office/mac/drawingml/2011/main" val="1"/>
+              <ma14:wrappingTextBoxFlag xmlns:ma14="http://schemas.microsoft.com/office/mac/drawingml/2011/main" xmlns:a14="http://schemas.microsoft.com/office/drawing/2010/main" xmlns:m="http://schemas.openxmlformats.org/officeDocument/2006/math" xmlns="" val="1"/>
             </a:ext>
           </a:extLst>
         </p:spPr>
@@ -6374,6 +8036,35 @@
             <a:r>
               <a:t>Gradle 9</a:t>
             </a:r>
+          </a:p>
+        </p:txBody>
+      </p:sp>
+      <p:sp>
+        <p:nvSpPr>
+          <p:cNvPr id="2" name="Slide Number Placeholder 1">
+            <a:extLst>
+              <a:ext uri="{FF2B5EF4-FFF2-40B4-BE49-F238E27FC236}">
+                <a16:creationId xmlns:a16="http://schemas.microsoft.com/office/drawing/2014/main" id="{765AEB08-B9B6-AF73-7167-06A34A1665F7}"/>
+              </a:ext>
+            </a:extLst>
+          </p:cNvPr>
+          <p:cNvSpPr>
+            <a:spLocks noGrp="1"/>
+          </p:cNvSpPr>
+          <p:nvPr>
+            <p:ph type="sldNum" sz="quarter" idx="2"/>
+          </p:nvPr>
+        </p:nvSpPr>
+        <p:spPr/>
+        <p:txBody>
+          <a:bodyPr/>
+          <a:lstStyle/>
+          <a:p>
+            <a:fld id="{86CB4B4D-7CA3-9044-876B-883B54F8677D}" type="slidenum">
+              <a:rPr lang="en-AU" smtClean="0"/>
+              <a:t>5</a:t>
+            </a:fld>
+            <a:endParaRPr lang="en-AU"/>
           </a:p>
         </p:txBody>
       </p:sp>
@@ -6473,7 +8164,7 @@
             <a:effectLst/>
             <a:extLst>
               <a:ext uri="{C572A759-6A51-4108-AA02-DFA0A04FC94B}">
-                <ma14:wrappingTextBoxFlag xmlns="" xmlns:m="http://schemas.openxmlformats.org/officeDocument/2006/math" xmlns:a14="http://schemas.microsoft.com/office/drawing/2010/main" xmlns:ma14="http://schemas.microsoft.com/office/mac/drawingml/2011/main" val="1"/>
+                <ma14:wrappingTextBoxFlag xmlns:ma14="http://schemas.microsoft.com/office/mac/drawingml/2011/main" xmlns:a14="http://schemas.microsoft.com/office/drawing/2010/main" xmlns:m="http://schemas.openxmlformats.org/officeDocument/2006/math" xmlns="" val="1"/>
               </a:ext>
             </a:extLst>
           </p:spPr>
@@ -6521,6 +8212,35 @@
           </a:ln>
         </p:spPr>
       </p:pic>
+      <p:sp>
+        <p:nvSpPr>
+          <p:cNvPr id="2" name="Slide Number Placeholder 1">
+            <a:extLst>
+              <a:ext uri="{FF2B5EF4-FFF2-40B4-BE49-F238E27FC236}">
+                <a16:creationId xmlns:a16="http://schemas.microsoft.com/office/drawing/2014/main" id="{6D86B7EA-B3BB-3D01-1CBD-5759D9487AD1}"/>
+              </a:ext>
+            </a:extLst>
+          </p:cNvPr>
+          <p:cNvSpPr>
+            <a:spLocks noGrp="1"/>
+          </p:cNvSpPr>
+          <p:nvPr>
+            <p:ph type="sldNum" sz="quarter" idx="2"/>
+          </p:nvPr>
+        </p:nvSpPr>
+        <p:spPr/>
+        <p:txBody>
+          <a:bodyPr/>
+          <a:lstStyle/>
+          <a:p>
+            <a:fld id="{86CB4B4D-7CA3-9044-876B-883B54F8677D}" type="slidenum">
+              <a:rPr lang="en-AU" smtClean="0"/>
+              <a:t>6</a:t>
+            </a:fld>
+            <a:endParaRPr lang="en-AU"/>
+          </a:p>
+        </p:txBody>
+      </p:sp>
     </p:spTree>
   </p:cSld>
   <p:clrMapOvr>
@@ -6617,7 +8337,7 @@
             <a:effectLst/>
             <a:extLst>
               <a:ext uri="{C572A759-6A51-4108-AA02-DFA0A04FC94B}">
-                <ma14:wrappingTextBoxFlag xmlns="" xmlns:m="http://schemas.openxmlformats.org/officeDocument/2006/math" xmlns:a14="http://schemas.microsoft.com/office/drawing/2010/main" xmlns:ma14="http://schemas.microsoft.com/office/mac/drawingml/2011/main" val="1"/>
+                <ma14:wrappingTextBoxFlag xmlns:ma14="http://schemas.microsoft.com/office/mac/drawingml/2011/main" xmlns:a14="http://schemas.microsoft.com/office/drawing/2010/main" xmlns:m="http://schemas.openxmlformats.org/officeDocument/2006/math" xmlns="" val="1"/>
               </a:ext>
             </a:extLst>
           </p:spPr>
@@ -6674,6 +8394,35 @@
           </a:prstGeom>
         </p:spPr>
       </p:pic>
+      <p:sp>
+        <p:nvSpPr>
+          <p:cNvPr id="2" name="Slide Number Placeholder 1">
+            <a:extLst>
+              <a:ext uri="{FF2B5EF4-FFF2-40B4-BE49-F238E27FC236}">
+                <a16:creationId xmlns:a16="http://schemas.microsoft.com/office/drawing/2014/main" id="{033ABC9F-6C1D-DD7E-AC81-62A9096BB433}"/>
+              </a:ext>
+            </a:extLst>
+          </p:cNvPr>
+          <p:cNvSpPr>
+            <a:spLocks noGrp="1"/>
+          </p:cNvSpPr>
+          <p:nvPr>
+            <p:ph type="sldNum" sz="quarter" idx="2"/>
+          </p:nvPr>
+        </p:nvSpPr>
+        <p:spPr/>
+        <p:txBody>
+          <a:bodyPr/>
+          <a:lstStyle/>
+          <a:p>
+            <a:fld id="{86CB4B4D-7CA3-9044-876B-883B54F8677D}" type="slidenum">
+              <a:rPr lang="en-AU" smtClean="0"/>
+              <a:t>7</a:t>
+            </a:fld>
+            <a:endParaRPr lang="en-AU"/>
+          </a:p>
+        </p:txBody>
+      </p:sp>
     </p:spTree>
   </p:cSld>
   <p:clrMapOvr>
@@ -6770,7 +8519,7 @@
             <a:effectLst/>
             <a:extLst>
               <a:ext uri="{C572A759-6A51-4108-AA02-DFA0A04FC94B}">
-                <ma14:wrappingTextBoxFlag xmlns="" xmlns:m="http://schemas.openxmlformats.org/officeDocument/2006/math" xmlns:a14="http://schemas.microsoft.com/office/drawing/2010/main" xmlns:ma14="http://schemas.microsoft.com/office/mac/drawingml/2011/main" val="1"/>
+                <ma14:wrappingTextBoxFlag xmlns:ma14="http://schemas.microsoft.com/office/mac/drawingml/2011/main" xmlns:a14="http://schemas.microsoft.com/office/drawing/2010/main" xmlns:m="http://schemas.openxmlformats.org/officeDocument/2006/math" xmlns="" val="1"/>
               </a:ext>
             </a:extLst>
           </p:spPr>
@@ -6810,7 +8559,7 @@
           </a:ln>
           <a:extLst>
             <a:ext uri="{C572A759-6A51-4108-AA02-DFA0A04FC94B}">
-              <ma14:wrappingTextBoxFlag xmlns="" xmlns:m="http://schemas.openxmlformats.org/officeDocument/2006/math" xmlns:a14="http://schemas.microsoft.com/office/drawing/2010/main" xmlns:ma14="http://schemas.microsoft.com/office/mac/drawingml/2011/main" val="1"/>
+              <ma14:wrappingTextBoxFlag xmlns:ma14="http://schemas.microsoft.com/office/mac/drawingml/2011/main" xmlns:a14="http://schemas.microsoft.com/office/drawing/2010/main" xmlns:m="http://schemas.openxmlformats.org/officeDocument/2006/math" xmlns="" val="1"/>
             </a:ext>
           </a:extLst>
         </p:spPr>
@@ -6890,6 +8639,35 @@
           </a:ln>
         </p:spPr>
       </p:pic>
+      <p:sp>
+        <p:nvSpPr>
+          <p:cNvPr id="2" name="Slide Number Placeholder 1">
+            <a:extLst>
+              <a:ext uri="{FF2B5EF4-FFF2-40B4-BE49-F238E27FC236}">
+                <a16:creationId xmlns:a16="http://schemas.microsoft.com/office/drawing/2014/main" id="{456894C5-E5B4-D087-9302-7FC6E739E2B6}"/>
+              </a:ext>
+            </a:extLst>
+          </p:cNvPr>
+          <p:cNvSpPr>
+            <a:spLocks noGrp="1"/>
+          </p:cNvSpPr>
+          <p:nvPr>
+            <p:ph type="sldNum" sz="quarter" idx="2"/>
+          </p:nvPr>
+        </p:nvSpPr>
+        <p:spPr/>
+        <p:txBody>
+          <a:bodyPr/>
+          <a:lstStyle/>
+          <a:p>
+            <a:fld id="{86CB4B4D-7CA3-9044-876B-883B54F8677D}" type="slidenum">
+              <a:rPr lang="en-AU" smtClean="0"/>
+              <a:t>8</a:t>
+            </a:fld>
+            <a:endParaRPr lang="en-AU"/>
+          </a:p>
+        </p:txBody>
+      </p:sp>
     </p:spTree>
   </p:cSld>
   <p:clrMapOvr>
@@ -6986,7 +8764,7 @@
             <a:effectLst/>
             <a:extLst>
               <a:ext uri="{C572A759-6A51-4108-AA02-DFA0A04FC94B}">
-                <ma14:wrappingTextBoxFlag xmlns="" xmlns:m="http://schemas.openxmlformats.org/officeDocument/2006/math" xmlns:a14="http://schemas.microsoft.com/office/drawing/2010/main" xmlns:ma14="http://schemas.microsoft.com/office/mac/drawingml/2011/main" val="1"/>
+                <ma14:wrappingTextBoxFlag xmlns:ma14="http://schemas.microsoft.com/office/mac/drawingml/2011/main" xmlns:a14="http://schemas.microsoft.com/office/drawing/2010/main" xmlns:m="http://schemas.openxmlformats.org/officeDocument/2006/math" xmlns="" val="1"/>
               </a:ext>
             </a:extLst>
           </p:spPr>
@@ -7026,7 +8804,7 @@
           </a:ln>
           <a:extLst>
             <a:ext uri="{C572A759-6A51-4108-AA02-DFA0A04FC94B}">
-              <ma14:wrappingTextBoxFlag xmlns="" xmlns:m="http://schemas.openxmlformats.org/officeDocument/2006/math" xmlns:a14="http://schemas.microsoft.com/office/drawing/2010/main" xmlns:ma14="http://schemas.microsoft.com/office/mac/drawingml/2011/main" val="1"/>
+              <ma14:wrappingTextBoxFlag xmlns:ma14="http://schemas.microsoft.com/office/mac/drawingml/2011/main" xmlns:a14="http://schemas.microsoft.com/office/drawing/2010/main" xmlns:m="http://schemas.openxmlformats.org/officeDocument/2006/math" xmlns="" val="1"/>
             </a:ext>
           </a:extLst>
         </p:spPr>
@@ -7173,6 +8951,35 @@
           </a:ln>
         </p:spPr>
       </p:pic>
+      <p:sp>
+        <p:nvSpPr>
+          <p:cNvPr id="2" name="Slide Number Placeholder 1">
+            <a:extLst>
+              <a:ext uri="{FF2B5EF4-FFF2-40B4-BE49-F238E27FC236}">
+                <a16:creationId xmlns:a16="http://schemas.microsoft.com/office/drawing/2014/main" id="{003592DB-D388-AD58-285E-BCBFF2E34A6F}"/>
+              </a:ext>
+            </a:extLst>
+          </p:cNvPr>
+          <p:cNvSpPr>
+            <a:spLocks noGrp="1"/>
+          </p:cNvSpPr>
+          <p:nvPr>
+            <p:ph type="sldNum" sz="quarter" idx="2"/>
+          </p:nvPr>
+        </p:nvSpPr>
+        <p:spPr/>
+        <p:txBody>
+          <a:bodyPr/>
+          <a:lstStyle/>
+          <a:p>
+            <a:fld id="{86CB4B4D-7CA3-9044-876B-883B54F8677D}" type="slidenum">
+              <a:rPr lang="en-AU" smtClean="0"/>
+              <a:t>9</a:t>
+            </a:fld>
+            <a:endParaRPr lang="en-AU"/>
+          </a:p>
+        </p:txBody>
+      </p:sp>
     </p:spTree>
   </p:cSld>
   <p:clrMapOvr>
